--- a/Final/Utli Barnabás bemutato.pptx
+++ b/Final/Utli Barnabás bemutato.pptx
@@ -6,6 +6,29 @@
   </p:sldMasterIdLst>
   <p:sldIdLst>
     <p:sldId id="256" r:id="rId2"/>
+    <p:sldId id="257" r:id="rId3"/>
+    <p:sldId id="258" r:id="rId4"/>
+    <p:sldId id="260" r:id="rId5"/>
+    <p:sldId id="259" r:id="rId6"/>
+    <p:sldId id="261" r:id="rId7"/>
+    <p:sldId id="262" r:id="rId8"/>
+    <p:sldId id="263" r:id="rId9"/>
+    <p:sldId id="264" r:id="rId10"/>
+    <p:sldId id="265" r:id="rId11"/>
+    <p:sldId id="266" r:id="rId12"/>
+    <p:sldId id="267" r:id="rId13"/>
+    <p:sldId id="268" r:id="rId14"/>
+    <p:sldId id="269" r:id="rId15"/>
+    <p:sldId id="270" r:id="rId16"/>
+    <p:sldId id="271" r:id="rId17"/>
+    <p:sldId id="272" r:id="rId18"/>
+    <p:sldId id="273" r:id="rId19"/>
+    <p:sldId id="274" r:id="rId20"/>
+    <p:sldId id="275" r:id="rId21"/>
+    <p:sldId id="279" r:id="rId22"/>
+    <p:sldId id="276" r:id="rId23"/>
+    <p:sldId id="277" r:id="rId24"/>
+    <p:sldId id="278" r:id="rId25"/>
   </p:sldIdLst>
   <p:sldSz cx="12192000" cy="6858000"/>
   <p:notesSz cx="6858000" cy="9144000"/>
@@ -104,6 +127,11 @@
       </a:defRPr>
     </a:lvl9pPr>
   </p:defaultTextStyle>
+  <p:extLst>
+    <p:ext uri="{EFAFB233-063F-42B5-8137-9DF3F51BA10A}">
+      <p15:sldGuideLst xmlns:p15="http://schemas.microsoft.com/office/powerpoint/2012/main"/>
+    </p:ext>
+  </p:extLst>
 </p:presentation>
 </file>
 
@@ -2740,9 +2768,24 @@
 <p:sldMaster xmlns:a="http://schemas.openxmlformats.org/drawingml/2006/main" xmlns:r="http://schemas.openxmlformats.org/officeDocument/2006/relationships" xmlns:p="http://schemas.openxmlformats.org/presentationml/2006/main">
   <p:cSld>
     <p:bg>
-      <p:bgRef idx="1001">
-        <a:schemeClr val="bg1"/>
-      </p:bgRef>
+      <p:bgPr>
+        <a:gradFill flip="none" rotWithShape="1">
+          <a:gsLst>
+            <a:gs pos="0">
+              <a:schemeClr val="tx1">
+                <a:lumMod val="85000"/>
+                <a:lumOff val="15000"/>
+              </a:schemeClr>
+            </a:gs>
+            <a:gs pos="100000">
+              <a:schemeClr val="tx1"/>
+            </a:gs>
+          </a:gsLst>
+          <a:lin ang="5400000" scaled="1"/>
+          <a:tileRect/>
+        </a:gradFill>
+        <a:effectLst/>
+      </p:bgPr>
     </p:bg>
     <p:spTree>
       <p:nvGrpSpPr>
@@ -3323,31 +3366,6 @@
       </p:grpSpPr>
       <p:sp>
         <p:nvSpPr>
-          <p:cNvPr id="2" name="Cím 1">
-            <a:extLst>
-              <a:ext uri="{FF2B5EF4-FFF2-40B4-BE49-F238E27FC236}">
-                <a16:creationId xmlns:a16="http://schemas.microsoft.com/office/drawing/2014/main" id="{039220BC-7AF1-1E4F-F889-5C0C9E90C702}"/>
-              </a:ext>
-            </a:extLst>
-          </p:cNvPr>
-          <p:cNvSpPr>
-            <a:spLocks noGrp="1"/>
-          </p:cNvSpPr>
-          <p:nvPr>
-            <p:ph type="ctrTitle"/>
-          </p:nvPr>
-        </p:nvSpPr>
-        <p:spPr/>
-        <p:txBody>
-          <a:bodyPr/>
-          <a:lstStyle/>
-          <a:p>
-            <a:endParaRPr lang="hu-HU"/>
-          </a:p>
-        </p:txBody>
-      </p:sp>
-      <p:sp>
-        <p:nvSpPr>
           <p:cNvPr id="3" name="Alcím 2">
             <a:extLst>
               <a:ext uri="{FF2B5EF4-FFF2-40B4-BE49-F238E27FC236}">
@@ -3362,19 +3380,4667 @@
             <p:ph type="subTitle" idx="1"/>
           </p:nvPr>
         </p:nvSpPr>
-        <p:spPr/>
-        <p:txBody>
-          <a:bodyPr/>
-          <a:lstStyle/>
-          <a:p>
-            <a:endParaRPr lang="hu-HU"/>
-          </a:p>
-        </p:txBody>
-      </p:sp>
+        <p:spPr>
+          <a:xfrm>
+            <a:off x="1524000" y="5040312"/>
+            <a:ext cx="9144000" cy="914400"/>
+          </a:xfrm>
+        </p:spPr>
+        <p:txBody>
+          <a:bodyPr>
+            <a:normAutofit/>
+          </a:bodyPr>
+          <a:lstStyle/>
+          <a:p>
+            <a:r>
+              <a:rPr lang="hu-HU" dirty="0">
+                <a:solidFill>
+                  <a:schemeClr val="bg1"/>
+                </a:solidFill>
+              </a:rPr>
+              <a:t>OSZTV Döntő</a:t>
+            </a:r>
+          </a:p>
+          <a:p>
+            <a:r>
+              <a:rPr lang="hu-HU" dirty="0">
+                <a:solidFill>
+                  <a:schemeClr val="bg1"/>
+                </a:solidFill>
+              </a:rPr>
+              <a:t>Előadó: Utli Barnabás</a:t>
+            </a:r>
+          </a:p>
+        </p:txBody>
+      </p:sp>
+      <p:pic>
+        <p:nvPicPr>
+          <p:cNvPr id="5" name="Kép 4">
+            <a:extLst>
+              <a:ext uri="{FF2B5EF4-FFF2-40B4-BE49-F238E27FC236}">
+                <a16:creationId xmlns:a16="http://schemas.microsoft.com/office/drawing/2014/main" id="{C61DB333-F6D4-992F-E100-21E01E098524}"/>
+              </a:ext>
+            </a:extLst>
+          </p:cNvPr>
+          <p:cNvPicPr>
+            <a:picLocks noChangeAspect="1"/>
+          </p:cNvPicPr>
+          <p:nvPr/>
+        </p:nvPicPr>
+        <p:blipFill>
+          <a:blip r:embed="rId2">
+            <a:extLst>
+              <a:ext uri="{28A0092B-C50C-407E-A947-70E740481C1C}">
+                <a14:useLocalDpi xmlns:a14="http://schemas.microsoft.com/office/drawing/2010/main" val="0"/>
+              </a:ext>
+            </a:extLst>
+          </a:blip>
+          <a:stretch>
+            <a:fillRect/>
+          </a:stretch>
+        </p:blipFill>
+        <p:spPr>
+          <a:xfrm>
+            <a:off x="4938460" y="903288"/>
+            <a:ext cx="2315080" cy="2387600"/>
+          </a:xfrm>
+          <a:prstGeom prst="rect">
+            <a:avLst/>
+          </a:prstGeom>
+        </p:spPr>
+      </p:pic>
+      <p:pic>
+        <p:nvPicPr>
+          <p:cNvPr id="7" name="Kép 6" descr="A képen Betűtípus, tipográfia, Grafika, szöveg látható&#10;&#10;Előfordulhat, hogy az AI által létrehozott tartalom helytelen.">
+            <a:extLst>
+              <a:ext uri="{FF2B5EF4-FFF2-40B4-BE49-F238E27FC236}">
+                <a16:creationId xmlns:a16="http://schemas.microsoft.com/office/drawing/2014/main" id="{1F866F06-B15D-8124-B1B2-4BC18FF8CDA7}"/>
+              </a:ext>
+            </a:extLst>
+          </p:cNvPr>
+          <p:cNvPicPr>
+            <a:picLocks noChangeAspect="1"/>
+          </p:cNvPicPr>
+          <p:nvPr/>
+        </p:nvPicPr>
+        <p:blipFill>
+          <a:blip r:embed="rId3">
+            <a:extLst>
+              <a:ext uri="{28A0092B-C50C-407E-A947-70E740481C1C}">
+                <a14:useLocalDpi xmlns:a14="http://schemas.microsoft.com/office/drawing/2010/main" val="0"/>
+              </a:ext>
+            </a:extLst>
+          </a:blip>
+          <a:stretch>
+            <a:fillRect/>
+          </a:stretch>
+        </p:blipFill>
+        <p:spPr>
+          <a:xfrm>
+            <a:off x="3377485" y="3567113"/>
+            <a:ext cx="5437029" cy="826049"/>
+          </a:xfrm>
+          <a:prstGeom prst="rect">
+            <a:avLst/>
+          </a:prstGeom>
+        </p:spPr>
+      </p:pic>
     </p:spTree>
     <p:extLst>
       <p:ext uri="{BB962C8B-B14F-4D97-AF65-F5344CB8AC3E}">
         <p14:creationId xmlns:p14="http://schemas.microsoft.com/office/powerpoint/2010/main" val="2341203003"/>
+      </p:ext>
+    </p:extLst>
+  </p:cSld>
+  <p:clrMapOvr>
+    <a:masterClrMapping/>
+  </p:clrMapOvr>
+  <p:timing>
+    <p:tnLst>
+      <p:par>
+        <p:cTn id="1" dur="indefinite" restart="never" nodeType="tmRoot">
+          <p:childTnLst>
+            <p:seq concurrent="1" nextAc="seek">
+              <p:cTn id="2" dur="indefinite" nodeType="mainSeq">
+                <p:childTnLst>
+                  <p:par>
+                    <p:cTn id="3" fill="hold">
+                      <p:stCondLst>
+                        <p:cond delay="indefinite"/>
+                      </p:stCondLst>
+                      <p:childTnLst>
+                        <p:par>
+                          <p:cTn id="4" fill="hold">
+                            <p:stCondLst>
+                              <p:cond delay="0"/>
+                            </p:stCondLst>
+                            <p:childTnLst>
+                              <p:par>
+                                <p:cTn id="5" presetID="2" presetClass="entr" presetSubtype="1" fill="hold" nodeType="clickEffect">
+                                  <p:stCondLst>
+                                    <p:cond delay="0"/>
+                                  </p:stCondLst>
+                                  <p:childTnLst>
+                                    <p:set>
+                                      <p:cBhvr>
+                                        <p:cTn id="6" dur="1" fill="hold">
+                                          <p:stCondLst>
+                                            <p:cond delay="0"/>
+                                          </p:stCondLst>
+                                        </p:cTn>
+                                        <p:tgtEl>
+                                          <p:spTgt spid="5"/>
+                                        </p:tgtEl>
+                                        <p:attrNameLst>
+                                          <p:attrName>style.visibility</p:attrName>
+                                        </p:attrNameLst>
+                                      </p:cBhvr>
+                                      <p:to>
+                                        <p:strVal val="visible"/>
+                                      </p:to>
+                                    </p:set>
+                                    <p:anim calcmode="lin" valueType="num">
+                                      <p:cBhvr additive="base">
+                                        <p:cTn id="7" dur="750" fill="hold"/>
+                                        <p:tgtEl>
+                                          <p:spTgt spid="5"/>
+                                        </p:tgtEl>
+                                        <p:attrNameLst>
+                                          <p:attrName>ppt_x</p:attrName>
+                                        </p:attrNameLst>
+                                      </p:cBhvr>
+                                      <p:tavLst>
+                                        <p:tav tm="0">
+                                          <p:val>
+                                            <p:strVal val="#ppt_x"/>
+                                          </p:val>
+                                        </p:tav>
+                                        <p:tav tm="100000">
+                                          <p:val>
+                                            <p:strVal val="#ppt_x"/>
+                                          </p:val>
+                                        </p:tav>
+                                      </p:tavLst>
+                                    </p:anim>
+                                    <p:anim calcmode="lin" valueType="num">
+                                      <p:cBhvr additive="base">
+                                        <p:cTn id="8" dur="750" fill="hold"/>
+                                        <p:tgtEl>
+                                          <p:spTgt spid="5"/>
+                                        </p:tgtEl>
+                                        <p:attrNameLst>
+                                          <p:attrName>ppt_y</p:attrName>
+                                        </p:attrNameLst>
+                                      </p:cBhvr>
+                                      <p:tavLst>
+                                        <p:tav tm="0">
+                                          <p:val>
+                                            <p:strVal val="0-#ppt_h/2"/>
+                                          </p:val>
+                                        </p:tav>
+                                        <p:tav tm="100000">
+                                          <p:val>
+                                            <p:strVal val="#ppt_y"/>
+                                          </p:val>
+                                        </p:tav>
+                                      </p:tavLst>
+                                    </p:anim>
+                                  </p:childTnLst>
+                                </p:cTn>
+                              </p:par>
+                            </p:childTnLst>
+                          </p:cTn>
+                        </p:par>
+                      </p:childTnLst>
+                    </p:cTn>
+                  </p:par>
+                  <p:par>
+                    <p:cTn id="9" fill="hold">
+                      <p:stCondLst>
+                        <p:cond delay="indefinite"/>
+                      </p:stCondLst>
+                      <p:childTnLst>
+                        <p:par>
+                          <p:cTn id="10" fill="hold">
+                            <p:stCondLst>
+                              <p:cond delay="0"/>
+                            </p:stCondLst>
+                            <p:childTnLst>
+                              <p:par>
+                                <p:cTn id="11" presetID="10" presetClass="entr" presetSubtype="0" fill="hold" nodeType="clickEffect">
+                                  <p:stCondLst>
+                                    <p:cond delay="0"/>
+                                  </p:stCondLst>
+                                  <p:childTnLst>
+                                    <p:set>
+                                      <p:cBhvr>
+                                        <p:cTn id="12" dur="1" fill="hold">
+                                          <p:stCondLst>
+                                            <p:cond delay="0"/>
+                                          </p:stCondLst>
+                                        </p:cTn>
+                                        <p:tgtEl>
+                                          <p:spTgt spid="7"/>
+                                        </p:tgtEl>
+                                        <p:attrNameLst>
+                                          <p:attrName>style.visibility</p:attrName>
+                                        </p:attrNameLst>
+                                      </p:cBhvr>
+                                      <p:to>
+                                        <p:strVal val="visible"/>
+                                      </p:to>
+                                    </p:set>
+                                    <p:animEffect transition="in" filter="fade">
+                                      <p:cBhvr>
+                                        <p:cTn id="13" dur="750"/>
+                                        <p:tgtEl>
+                                          <p:spTgt spid="7"/>
+                                        </p:tgtEl>
+                                      </p:cBhvr>
+                                    </p:animEffect>
+                                  </p:childTnLst>
+                                </p:cTn>
+                              </p:par>
+                            </p:childTnLst>
+                          </p:cTn>
+                        </p:par>
+                      </p:childTnLst>
+                    </p:cTn>
+                  </p:par>
+                </p:childTnLst>
+              </p:cTn>
+              <p:prevCondLst>
+                <p:cond evt="onPrev" delay="0">
+                  <p:tgtEl>
+                    <p:sldTgt/>
+                  </p:tgtEl>
+                </p:cond>
+              </p:prevCondLst>
+              <p:nextCondLst>
+                <p:cond evt="onNext" delay="0">
+                  <p:tgtEl>
+                    <p:sldTgt/>
+                  </p:tgtEl>
+                </p:cond>
+              </p:nextCondLst>
+            </p:seq>
+          </p:childTnLst>
+        </p:cTn>
+      </p:par>
+    </p:tnLst>
+  </p:timing>
+</p:sld>
+</file>
+
+<file path=ppt/slides/slide10.xml><?xml version="1.0" encoding="utf-8"?>
+<p:sld xmlns:a="http://schemas.openxmlformats.org/drawingml/2006/main" xmlns:r="http://schemas.openxmlformats.org/officeDocument/2006/relationships" xmlns:p="http://schemas.openxmlformats.org/presentationml/2006/main">
+  <p:cSld>
+    <p:spTree>
+      <p:nvGrpSpPr>
+        <p:cNvPr id="1" name=""/>
+        <p:cNvGrpSpPr/>
+        <p:nvPr/>
+      </p:nvGrpSpPr>
+      <p:grpSpPr>
+        <a:xfrm>
+          <a:off x="0" y="0"/>
+          <a:ext cx="0" cy="0"/>
+          <a:chOff x="0" y="0"/>
+          <a:chExt cx="0" cy="0"/>
+        </a:xfrm>
+      </p:grpSpPr>
+      <p:sp>
+        <p:nvSpPr>
+          <p:cNvPr id="2" name="Cím 1">
+            <a:extLst>
+              <a:ext uri="{FF2B5EF4-FFF2-40B4-BE49-F238E27FC236}">
+                <a16:creationId xmlns:a16="http://schemas.microsoft.com/office/drawing/2014/main" id="{9B01367A-A795-C8D0-B4D6-69823641D98A}"/>
+              </a:ext>
+            </a:extLst>
+          </p:cNvPr>
+          <p:cNvSpPr>
+            <a:spLocks noGrp="1"/>
+          </p:cNvSpPr>
+          <p:nvPr>
+            <p:ph type="title"/>
+          </p:nvPr>
+        </p:nvSpPr>
+        <p:spPr/>
+        <p:txBody>
+          <a:bodyPr/>
+          <a:lstStyle/>
+          <a:p>
+            <a:r>
+              <a:rPr lang="hu-HU" b="1" dirty="0" err="1">
+                <a:solidFill>
+                  <a:schemeClr val="bg1"/>
+                </a:solidFill>
+              </a:rPr>
+              <a:t>Domain</a:t>
+            </a:r>
+            <a:r>
+              <a:rPr lang="hu-HU" b="1" dirty="0">
+                <a:solidFill>
+                  <a:schemeClr val="bg1"/>
+                </a:solidFill>
+              </a:rPr>
+              <a:t> </a:t>
+            </a:r>
+            <a:r>
+              <a:rPr lang="hu-HU" b="1" dirty="0" err="1">
+                <a:solidFill>
+                  <a:schemeClr val="bg1"/>
+                </a:solidFill>
+              </a:rPr>
+              <a:t>Controller</a:t>
+            </a:r>
+            <a:r>
+              <a:rPr lang="hu-HU" b="1" dirty="0">
+                <a:solidFill>
+                  <a:schemeClr val="bg1"/>
+                </a:solidFill>
+              </a:rPr>
+              <a:t> architektúra</a:t>
+            </a:r>
+          </a:p>
+        </p:txBody>
+      </p:sp>
+      <p:sp>
+        <p:nvSpPr>
+          <p:cNvPr id="3" name="Tartalom helye 2">
+            <a:extLst>
+              <a:ext uri="{FF2B5EF4-FFF2-40B4-BE49-F238E27FC236}">
+                <a16:creationId xmlns:a16="http://schemas.microsoft.com/office/drawing/2014/main" id="{27ED034E-2EB3-5CE3-8D7B-60BCE9CAC879}"/>
+              </a:ext>
+            </a:extLst>
+          </p:cNvPr>
+          <p:cNvSpPr>
+            <a:spLocks noGrp="1"/>
+          </p:cNvSpPr>
+          <p:nvPr>
+            <p:ph sz="half" idx="1"/>
+          </p:nvPr>
+        </p:nvSpPr>
+        <p:spPr>
+          <a:xfrm>
+            <a:off x="838200" y="1825625"/>
+            <a:ext cx="4035552" cy="4351338"/>
+          </a:xfrm>
+        </p:spPr>
+        <p:txBody>
+          <a:bodyPr/>
+          <a:lstStyle/>
+          <a:p>
+            <a:pPr>
+              <a:lnSpc>
+                <a:spcPct val="150000"/>
+              </a:lnSpc>
+            </a:pPr>
+            <a:r>
+              <a:rPr lang="hu-HU" dirty="0">
+                <a:solidFill>
+                  <a:schemeClr val="bg1"/>
+                </a:solidFill>
+              </a:rPr>
+              <a:t>2 </a:t>
+            </a:r>
+            <a:r>
+              <a:rPr lang="hu-HU" dirty="0" err="1">
+                <a:solidFill>
+                  <a:schemeClr val="bg1"/>
+                </a:solidFill>
+              </a:rPr>
+              <a:t>Domain</a:t>
+            </a:r>
+            <a:r>
+              <a:rPr lang="hu-HU" dirty="0">
+                <a:solidFill>
+                  <a:schemeClr val="bg1"/>
+                </a:solidFill>
+              </a:rPr>
+              <a:t> </a:t>
+            </a:r>
+            <a:r>
+              <a:rPr lang="hu-HU" dirty="0" err="1">
+                <a:solidFill>
+                  <a:schemeClr val="bg1"/>
+                </a:solidFill>
+              </a:rPr>
+              <a:t>Controller</a:t>
+            </a:r>
+            <a:endParaRPr lang="hu-HU" dirty="0">
+              <a:solidFill>
+                <a:schemeClr val="bg1"/>
+              </a:solidFill>
+            </a:endParaRPr>
+          </a:p>
+          <a:p>
+            <a:pPr>
+              <a:lnSpc>
+                <a:spcPct val="150000"/>
+              </a:lnSpc>
+            </a:pPr>
+            <a:r>
+              <a:rPr lang="hu-HU" dirty="0">
+                <a:solidFill>
+                  <a:schemeClr val="bg1"/>
+                </a:solidFill>
+              </a:rPr>
+              <a:t>AD-integrált DNS</a:t>
+            </a:r>
+          </a:p>
+          <a:p>
+            <a:pPr>
+              <a:lnSpc>
+                <a:spcPct val="150000"/>
+              </a:lnSpc>
+            </a:pPr>
+            <a:r>
+              <a:rPr lang="hu-HU" dirty="0">
+                <a:solidFill>
+                  <a:schemeClr val="bg1"/>
+                </a:solidFill>
+              </a:rPr>
+              <a:t>Replikáció</a:t>
+            </a:r>
+          </a:p>
+        </p:txBody>
+      </p:sp>
+      <p:pic>
+        <p:nvPicPr>
+          <p:cNvPr id="7" name="Tartalom helye 6" descr="A képen szöveg, képernyőkép, szoftver, képernyő látható&#10;&#10;Előfordulhat, hogy az AI által létrehozott tartalom helytelen.">
+            <a:extLst>
+              <a:ext uri="{FF2B5EF4-FFF2-40B4-BE49-F238E27FC236}">
+                <a16:creationId xmlns:a16="http://schemas.microsoft.com/office/drawing/2014/main" id="{4940AAF1-6FB2-97B9-D4FC-D305A2D3CE6E}"/>
+              </a:ext>
+            </a:extLst>
+          </p:cNvPr>
+          <p:cNvPicPr>
+            <a:picLocks noGrp="1" noChangeAspect="1"/>
+          </p:cNvPicPr>
+          <p:nvPr>
+            <p:ph sz="half" idx="2"/>
+          </p:nvPr>
+        </p:nvPicPr>
+        <p:blipFill>
+          <a:blip r:embed="rId2">
+            <a:extLst>
+              <a:ext uri="{28A0092B-C50C-407E-A947-70E740481C1C}">
+                <a14:useLocalDpi xmlns:a14="http://schemas.microsoft.com/office/drawing/2010/main" val="0"/>
+              </a:ext>
+            </a:extLst>
+          </a:blip>
+          <a:stretch>
+            <a:fillRect/>
+          </a:stretch>
+        </p:blipFill>
+        <p:spPr>
+          <a:xfrm>
+            <a:off x="5184648" y="1991423"/>
+            <a:ext cx="6166772" cy="4111181"/>
+          </a:xfrm>
+          <a:prstGeom prst="rect">
+            <a:avLst/>
+          </a:prstGeom>
+        </p:spPr>
+      </p:pic>
+    </p:spTree>
+    <p:extLst>
+      <p:ext uri="{BB962C8B-B14F-4D97-AF65-F5344CB8AC3E}">
+        <p14:creationId xmlns:p14="http://schemas.microsoft.com/office/powerpoint/2010/main" val="2533039942"/>
+      </p:ext>
+    </p:extLst>
+  </p:cSld>
+  <p:clrMapOvr>
+    <a:masterClrMapping/>
+  </p:clrMapOvr>
+</p:sld>
+</file>
+
+<file path=ppt/slides/slide11.xml><?xml version="1.0" encoding="utf-8"?>
+<p:sld xmlns:a="http://schemas.openxmlformats.org/drawingml/2006/main" xmlns:r="http://schemas.openxmlformats.org/officeDocument/2006/relationships" xmlns:p="http://schemas.openxmlformats.org/presentationml/2006/main">
+  <p:cSld>
+    <p:spTree>
+      <p:nvGrpSpPr>
+        <p:cNvPr id="1" name=""/>
+        <p:cNvGrpSpPr/>
+        <p:nvPr/>
+      </p:nvGrpSpPr>
+      <p:grpSpPr>
+        <a:xfrm>
+          <a:off x="0" y="0"/>
+          <a:ext cx="0" cy="0"/>
+          <a:chOff x="0" y="0"/>
+          <a:chExt cx="0" cy="0"/>
+        </a:xfrm>
+      </p:grpSpPr>
+      <p:sp>
+        <p:nvSpPr>
+          <p:cNvPr id="2" name="Cím 1">
+            <a:extLst>
+              <a:ext uri="{FF2B5EF4-FFF2-40B4-BE49-F238E27FC236}">
+                <a16:creationId xmlns:a16="http://schemas.microsoft.com/office/drawing/2014/main" id="{C6AFB73D-4EDB-73B7-8B6B-E37111DE659C}"/>
+              </a:ext>
+            </a:extLst>
+          </p:cNvPr>
+          <p:cNvSpPr>
+            <a:spLocks noGrp="1"/>
+          </p:cNvSpPr>
+          <p:nvPr>
+            <p:ph type="title"/>
+          </p:nvPr>
+        </p:nvSpPr>
+        <p:spPr/>
+        <p:txBody>
+          <a:bodyPr/>
+          <a:lstStyle/>
+          <a:p>
+            <a:r>
+              <a:rPr lang="hu-HU" b="1" dirty="0">
+                <a:solidFill>
+                  <a:schemeClr val="bg1"/>
+                </a:solidFill>
+              </a:rPr>
+              <a:t>DNS szerepe és redundancia</a:t>
+            </a:r>
+          </a:p>
+        </p:txBody>
+      </p:sp>
+      <p:sp>
+        <p:nvSpPr>
+          <p:cNvPr id="3" name="Tartalom helye 2">
+            <a:extLst>
+              <a:ext uri="{FF2B5EF4-FFF2-40B4-BE49-F238E27FC236}">
+                <a16:creationId xmlns:a16="http://schemas.microsoft.com/office/drawing/2014/main" id="{2128C9EF-1AA1-EDDD-78D9-9B36F7AFD475}"/>
+              </a:ext>
+            </a:extLst>
+          </p:cNvPr>
+          <p:cNvSpPr>
+            <a:spLocks noGrp="1"/>
+          </p:cNvSpPr>
+          <p:nvPr>
+            <p:ph sz="half" idx="1"/>
+          </p:nvPr>
+        </p:nvSpPr>
+        <p:spPr>
+          <a:xfrm>
+            <a:off x="838200" y="1825625"/>
+            <a:ext cx="4209288" cy="4351338"/>
+          </a:xfrm>
+        </p:spPr>
+        <p:txBody>
+          <a:bodyPr/>
+          <a:lstStyle/>
+          <a:p>
+            <a:pPr>
+              <a:lnSpc>
+                <a:spcPct val="150000"/>
+              </a:lnSpc>
+            </a:pPr>
+            <a:r>
+              <a:rPr lang="hu-HU" dirty="0">
+                <a:solidFill>
+                  <a:schemeClr val="bg1"/>
+                </a:solidFill>
+              </a:rPr>
+              <a:t>AD működés alapja</a:t>
+            </a:r>
+          </a:p>
+          <a:p>
+            <a:pPr>
+              <a:lnSpc>
+                <a:spcPct val="150000"/>
+              </a:lnSpc>
+            </a:pPr>
+            <a:r>
+              <a:rPr lang="hu-HU" dirty="0" err="1">
+                <a:solidFill>
+                  <a:schemeClr val="bg1"/>
+                </a:solidFill>
+              </a:rPr>
+              <a:t>Forward</a:t>
+            </a:r>
+            <a:r>
+              <a:rPr lang="hu-HU" dirty="0">
+                <a:solidFill>
+                  <a:schemeClr val="bg1"/>
+                </a:solidFill>
+              </a:rPr>
+              <a:t> és </a:t>
+            </a:r>
+            <a:r>
+              <a:rPr lang="hu-HU" dirty="0" err="1">
+                <a:solidFill>
+                  <a:schemeClr val="bg1"/>
+                </a:solidFill>
+              </a:rPr>
+              <a:t>Reverse</a:t>
+            </a:r>
+            <a:r>
+              <a:rPr lang="hu-HU" dirty="0">
+                <a:solidFill>
+                  <a:schemeClr val="bg1"/>
+                </a:solidFill>
+              </a:rPr>
+              <a:t> zóna</a:t>
+            </a:r>
+          </a:p>
+          <a:p>
+            <a:pPr>
+              <a:lnSpc>
+                <a:spcPct val="150000"/>
+              </a:lnSpc>
+            </a:pPr>
+            <a:r>
+              <a:rPr lang="hu-HU" dirty="0">
+                <a:solidFill>
+                  <a:schemeClr val="bg1"/>
+                </a:solidFill>
+              </a:rPr>
+              <a:t>Mindkét DC DNS szerver</a:t>
+            </a:r>
+          </a:p>
+          <a:p>
+            <a:pPr>
+              <a:lnSpc>
+                <a:spcPct val="150000"/>
+              </a:lnSpc>
+            </a:pPr>
+            <a:r>
+              <a:rPr lang="hu-HU" dirty="0">
+                <a:solidFill>
+                  <a:schemeClr val="bg1"/>
+                </a:solidFill>
+              </a:rPr>
+              <a:t>Automatikus replikáció</a:t>
+            </a:r>
+          </a:p>
+        </p:txBody>
+      </p:sp>
+      <p:pic>
+        <p:nvPicPr>
+          <p:cNvPr id="8" name="Tartalom helye 7" descr="A képen szöveg, képernyőkép, szoftver, szám látható&#10;&#10;Előfordulhat, hogy az AI által létrehozott tartalom helytelen.">
+            <a:extLst>
+              <a:ext uri="{FF2B5EF4-FFF2-40B4-BE49-F238E27FC236}">
+                <a16:creationId xmlns:a16="http://schemas.microsoft.com/office/drawing/2014/main" id="{BFE2F8A5-2803-D4EB-092E-0077C3EEB59C}"/>
+              </a:ext>
+            </a:extLst>
+          </p:cNvPr>
+          <p:cNvPicPr>
+            <a:picLocks noGrp="1" noChangeAspect="1"/>
+          </p:cNvPicPr>
+          <p:nvPr>
+            <p:ph sz="half" idx="2"/>
+          </p:nvPr>
+        </p:nvPicPr>
+        <p:blipFill>
+          <a:blip r:embed="rId2">
+            <a:extLst>
+              <a:ext uri="{28A0092B-C50C-407E-A947-70E740481C1C}">
+                <a14:useLocalDpi xmlns:a14="http://schemas.microsoft.com/office/drawing/2010/main" val="0"/>
+              </a:ext>
+            </a:extLst>
+          </a:blip>
+          <a:stretch>
+            <a:fillRect/>
+          </a:stretch>
+        </p:blipFill>
+        <p:spPr>
+          <a:xfrm>
+            <a:off x="5302265" y="2133536"/>
+            <a:ext cx="6051535" cy="3735515"/>
+          </a:xfrm>
+          <a:prstGeom prst="rect">
+            <a:avLst/>
+          </a:prstGeom>
+        </p:spPr>
+      </p:pic>
+    </p:spTree>
+    <p:extLst>
+      <p:ext uri="{BB962C8B-B14F-4D97-AF65-F5344CB8AC3E}">
+        <p14:creationId xmlns:p14="http://schemas.microsoft.com/office/powerpoint/2010/main" val="1597060882"/>
+      </p:ext>
+    </p:extLst>
+  </p:cSld>
+  <p:clrMapOvr>
+    <a:masterClrMapping/>
+  </p:clrMapOvr>
+</p:sld>
+</file>
+
+<file path=ppt/slides/slide12.xml><?xml version="1.0" encoding="utf-8"?>
+<p:sld xmlns:a="http://schemas.openxmlformats.org/drawingml/2006/main" xmlns:r="http://schemas.openxmlformats.org/officeDocument/2006/relationships" xmlns:p="http://schemas.openxmlformats.org/presentationml/2006/main">
+  <p:cSld>
+    <p:spTree>
+      <p:nvGrpSpPr>
+        <p:cNvPr id="1" name=""/>
+        <p:cNvGrpSpPr/>
+        <p:nvPr/>
+      </p:nvGrpSpPr>
+      <p:grpSpPr>
+        <a:xfrm>
+          <a:off x="0" y="0"/>
+          <a:ext cx="0" cy="0"/>
+          <a:chOff x="0" y="0"/>
+          <a:chExt cx="0" cy="0"/>
+        </a:xfrm>
+      </p:grpSpPr>
+      <p:sp>
+        <p:nvSpPr>
+          <p:cNvPr id="2" name="Cím 1">
+            <a:extLst>
+              <a:ext uri="{FF2B5EF4-FFF2-40B4-BE49-F238E27FC236}">
+                <a16:creationId xmlns:a16="http://schemas.microsoft.com/office/drawing/2014/main" id="{3CC9DB32-DFDF-24F5-1593-ED5FE8747F17}"/>
+              </a:ext>
+            </a:extLst>
+          </p:cNvPr>
+          <p:cNvSpPr>
+            <a:spLocks noGrp="1"/>
+          </p:cNvSpPr>
+          <p:nvPr>
+            <p:ph type="title"/>
+          </p:nvPr>
+        </p:nvSpPr>
+        <p:spPr/>
+        <p:txBody>
+          <a:bodyPr/>
+          <a:lstStyle/>
+          <a:p>
+            <a:r>
+              <a:rPr lang="hu-HU" b="1" dirty="0">
+                <a:solidFill>
+                  <a:schemeClr val="bg1"/>
+                </a:solidFill>
+              </a:rPr>
+              <a:t>GPO szerepe</a:t>
+            </a:r>
+          </a:p>
+        </p:txBody>
+      </p:sp>
+      <p:sp>
+        <p:nvSpPr>
+          <p:cNvPr id="3" name="Tartalom helye 2">
+            <a:extLst>
+              <a:ext uri="{FF2B5EF4-FFF2-40B4-BE49-F238E27FC236}">
+                <a16:creationId xmlns:a16="http://schemas.microsoft.com/office/drawing/2014/main" id="{316F35FB-A8FA-8EAC-CB24-E513D8583D52}"/>
+              </a:ext>
+            </a:extLst>
+          </p:cNvPr>
+          <p:cNvSpPr>
+            <a:spLocks noGrp="1"/>
+          </p:cNvSpPr>
+          <p:nvPr>
+            <p:ph idx="1"/>
+          </p:nvPr>
+        </p:nvSpPr>
+        <p:spPr/>
+        <p:txBody>
+          <a:bodyPr/>
+          <a:lstStyle/>
+          <a:p>
+            <a:pPr>
+              <a:lnSpc>
+                <a:spcPct val="150000"/>
+              </a:lnSpc>
+            </a:pPr>
+            <a:r>
+              <a:rPr lang="hu-HU" dirty="0">
+                <a:solidFill>
+                  <a:schemeClr val="bg1"/>
+                </a:solidFill>
+              </a:rPr>
+              <a:t>Meghajtócsatolás</a:t>
+            </a:r>
+          </a:p>
+          <a:p>
+            <a:pPr>
+              <a:lnSpc>
+                <a:spcPct val="150000"/>
+              </a:lnSpc>
+            </a:pPr>
+            <a:r>
+              <a:rPr lang="hu-HU" dirty="0">
+                <a:solidFill>
+                  <a:schemeClr val="bg1"/>
+                </a:solidFill>
+              </a:rPr>
+              <a:t>Vállalati arculat</a:t>
+            </a:r>
+          </a:p>
+          <a:p>
+            <a:pPr>
+              <a:lnSpc>
+                <a:spcPct val="150000"/>
+              </a:lnSpc>
+            </a:pPr>
+            <a:r>
+              <a:rPr lang="hu-HU" dirty="0">
+                <a:solidFill>
+                  <a:schemeClr val="bg1"/>
+                </a:solidFill>
+              </a:rPr>
+              <a:t>Szoftvertelepítés</a:t>
+            </a:r>
+          </a:p>
+        </p:txBody>
+      </p:sp>
+    </p:spTree>
+    <p:extLst>
+      <p:ext uri="{BB962C8B-B14F-4D97-AF65-F5344CB8AC3E}">
+        <p14:creationId xmlns:p14="http://schemas.microsoft.com/office/powerpoint/2010/main" val="69866425"/>
+      </p:ext>
+    </p:extLst>
+  </p:cSld>
+  <p:clrMapOvr>
+    <a:masterClrMapping/>
+  </p:clrMapOvr>
+</p:sld>
+</file>
+
+<file path=ppt/slides/slide13.xml><?xml version="1.0" encoding="utf-8"?>
+<p:sld xmlns:a="http://schemas.openxmlformats.org/drawingml/2006/main" xmlns:r="http://schemas.openxmlformats.org/officeDocument/2006/relationships" xmlns:p="http://schemas.openxmlformats.org/presentationml/2006/main">
+  <p:cSld>
+    <p:spTree>
+      <p:nvGrpSpPr>
+        <p:cNvPr id="1" name=""/>
+        <p:cNvGrpSpPr/>
+        <p:nvPr/>
+      </p:nvGrpSpPr>
+      <p:grpSpPr>
+        <a:xfrm>
+          <a:off x="0" y="0"/>
+          <a:ext cx="0" cy="0"/>
+          <a:chOff x="0" y="0"/>
+          <a:chExt cx="0" cy="0"/>
+        </a:xfrm>
+      </p:grpSpPr>
+      <p:sp>
+        <p:nvSpPr>
+          <p:cNvPr id="2" name="Cím 1">
+            <a:extLst>
+              <a:ext uri="{FF2B5EF4-FFF2-40B4-BE49-F238E27FC236}">
+                <a16:creationId xmlns:a16="http://schemas.microsoft.com/office/drawing/2014/main" id="{2EFEB8C7-86F6-5001-DEC5-7C88B891D685}"/>
+              </a:ext>
+            </a:extLst>
+          </p:cNvPr>
+          <p:cNvSpPr>
+            <a:spLocks noGrp="1"/>
+          </p:cNvSpPr>
+          <p:nvPr>
+            <p:ph type="title"/>
+          </p:nvPr>
+        </p:nvSpPr>
+        <p:spPr/>
+        <p:txBody>
+          <a:bodyPr/>
+          <a:lstStyle/>
+          <a:p>
+            <a:r>
+              <a:rPr lang="hu-HU" b="1" dirty="0">
+                <a:solidFill>
+                  <a:schemeClr val="bg1"/>
+                </a:solidFill>
+              </a:rPr>
+              <a:t>Közös meghajtó</a:t>
+            </a:r>
+          </a:p>
+        </p:txBody>
+      </p:sp>
+      <p:sp>
+        <p:nvSpPr>
+          <p:cNvPr id="3" name="Tartalom helye 2">
+            <a:extLst>
+              <a:ext uri="{FF2B5EF4-FFF2-40B4-BE49-F238E27FC236}">
+                <a16:creationId xmlns:a16="http://schemas.microsoft.com/office/drawing/2014/main" id="{A6D8BE0E-C3DB-5FC0-7DD9-AA657DE7FA41}"/>
+              </a:ext>
+            </a:extLst>
+          </p:cNvPr>
+          <p:cNvSpPr>
+            <a:spLocks noGrp="1"/>
+          </p:cNvSpPr>
+          <p:nvPr>
+            <p:ph sz="half" idx="1"/>
+          </p:nvPr>
+        </p:nvSpPr>
+        <p:spPr/>
+        <p:txBody>
+          <a:bodyPr/>
+          <a:lstStyle/>
+          <a:p>
+            <a:pPr>
+              <a:lnSpc>
+                <a:spcPct val="150000"/>
+              </a:lnSpc>
+            </a:pPr>
+            <a:r>
+              <a:rPr lang="hu-HU" dirty="0">
+                <a:solidFill>
+                  <a:schemeClr val="bg1"/>
+                </a:solidFill>
+              </a:rPr>
+              <a:t>Minden dolgozó számára</a:t>
+            </a:r>
+          </a:p>
+          <a:p>
+            <a:pPr>
+              <a:lnSpc>
+                <a:spcPct val="150000"/>
+              </a:lnSpc>
+            </a:pPr>
+            <a:r>
+              <a:rPr lang="hu-HU" dirty="0">
+                <a:solidFill>
+                  <a:schemeClr val="bg1"/>
+                </a:solidFill>
+              </a:rPr>
+              <a:t>Céges dokumentáció</a:t>
+            </a:r>
+          </a:p>
+          <a:p>
+            <a:pPr>
+              <a:lnSpc>
+                <a:spcPct val="150000"/>
+              </a:lnSpc>
+            </a:pPr>
+            <a:r>
+              <a:rPr lang="hu-HU" dirty="0">
+                <a:solidFill>
+                  <a:schemeClr val="bg1"/>
+                </a:solidFill>
+              </a:rPr>
+              <a:t>Szabályzatok</a:t>
+            </a:r>
+          </a:p>
+        </p:txBody>
+      </p:sp>
+      <p:pic>
+        <p:nvPicPr>
+          <p:cNvPr id="7" name="Tartalom helye 6" descr="A képen szöveg, képernyőkép, szoftver, Számítógépes ikon látható&#10;&#10;Előfordulhat, hogy az AI által létrehozott tartalom helytelen.">
+            <a:extLst>
+              <a:ext uri="{FF2B5EF4-FFF2-40B4-BE49-F238E27FC236}">
+                <a16:creationId xmlns:a16="http://schemas.microsoft.com/office/drawing/2014/main" id="{5061CEC7-7B6F-CD07-0D41-96F54D9046FA}"/>
+              </a:ext>
+            </a:extLst>
+          </p:cNvPr>
+          <p:cNvPicPr>
+            <a:picLocks noGrp="1" noChangeAspect="1"/>
+          </p:cNvPicPr>
+          <p:nvPr>
+            <p:ph sz="half" idx="2"/>
+          </p:nvPr>
+        </p:nvPicPr>
+        <p:blipFill>
+          <a:blip r:embed="rId2">
+            <a:extLst>
+              <a:ext uri="{28A0092B-C50C-407E-A947-70E740481C1C}">
+                <a14:useLocalDpi xmlns:a14="http://schemas.microsoft.com/office/drawing/2010/main" val="0"/>
+              </a:ext>
+            </a:extLst>
+          </a:blip>
+          <a:stretch>
+            <a:fillRect/>
+          </a:stretch>
+        </p:blipFill>
+        <p:spPr>
+          <a:xfrm>
+            <a:off x="5623560" y="1874875"/>
+            <a:ext cx="5730240" cy="4122264"/>
+          </a:xfrm>
+          <a:prstGeom prst="rect">
+            <a:avLst/>
+          </a:prstGeom>
+        </p:spPr>
+      </p:pic>
+    </p:spTree>
+    <p:extLst>
+      <p:ext uri="{BB962C8B-B14F-4D97-AF65-F5344CB8AC3E}">
+        <p14:creationId xmlns:p14="http://schemas.microsoft.com/office/powerpoint/2010/main" val="1850421217"/>
+      </p:ext>
+    </p:extLst>
+  </p:cSld>
+  <p:clrMapOvr>
+    <a:masterClrMapping/>
+  </p:clrMapOvr>
+</p:sld>
+</file>
+
+<file path=ppt/slides/slide14.xml><?xml version="1.0" encoding="utf-8"?>
+<p:sld xmlns:a="http://schemas.openxmlformats.org/drawingml/2006/main" xmlns:r="http://schemas.openxmlformats.org/officeDocument/2006/relationships" xmlns:p="http://schemas.openxmlformats.org/presentationml/2006/main">
+  <p:cSld>
+    <p:spTree>
+      <p:nvGrpSpPr>
+        <p:cNvPr id="1" name=""/>
+        <p:cNvGrpSpPr/>
+        <p:nvPr/>
+      </p:nvGrpSpPr>
+      <p:grpSpPr>
+        <a:xfrm>
+          <a:off x="0" y="0"/>
+          <a:ext cx="0" cy="0"/>
+          <a:chOff x="0" y="0"/>
+          <a:chExt cx="0" cy="0"/>
+        </a:xfrm>
+      </p:grpSpPr>
+      <p:sp>
+        <p:nvSpPr>
+          <p:cNvPr id="2" name="Cím 1">
+            <a:extLst>
+              <a:ext uri="{FF2B5EF4-FFF2-40B4-BE49-F238E27FC236}">
+                <a16:creationId xmlns:a16="http://schemas.microsoft.com/office/drawing/2014/main" id="{AAF75959-92AB-C6E3-DC9F-1F48773F88A8}"/>
+              </a:ext>
+            </a:extLst>
+          </p:cNvPr>
+          <p:cNvSpPr>
+            <a:spLocks noGrp="1"/>
+          </p:cNvSpPr>
+          <p:nvPr>
+            <p:ph type="title"/>
+          </p:nvPr>
+        </p:nvSpPr>
+        <p:spPr/>
+        <p:txBody>
+          <a:bodyPr/>
+          <a:lstStyle/>
+          <a:p>
+            <a:r>
+              <a:rPr lang="hu-HU" b="1" dirty="0">
+                <a:solidFill>
+                  <a:schemeClr val="bg1"/>
+                </a:solidFill>
+              </a:rPr>
+              <a:t>Részlegmeghajtók</a:t>
+            </a:r>
+          </a:p>
+        </p:txBody>
+      </p:sp>
+      <p:sp>
+        <p:nvSpPr>
+          <p:cNvPr id="3" name="Tartalom helye 2">
+            <a:extLst>
+              <a:ext uri="{FF2B5EF4-FFF2-40B4-BE49-F238E27FC236}">
+                <a16:creationId xmlns:a16="http://schemas.microsoft.com/office/drawing/2014/main" id="{577521CC-B57D-5529-FBA4-A3A740B31266}"/>
+              </a:ext>
+            </a:extLst>
+          </p:cNvPr>
+          <p:cNvSpPr>
+            <a:spLocks noGrp="1"/>
+          </p:cNvSpPr>
+          <p:nvPr>
+            <p:ph sz="half" idx="1"/>
+          </p:nvPr>
+        </p:nvSpPr>
+        <p:spPr>
+          <a:xfrm>
+            <a:off x="838200" y="1825625"/>
+            <a:ext cx="3578352" cy="4351338"/>
+          </a:xfrm>
+        </p:spPr>
+        <p:txBody>
+          <a:bodyPr>
+            <a:normAutofit fontScale="92500" lnSpcReduction="10000"/>
+          </a:bodyPr>
+          <a:lstStyle/>
+          <a:p>
+            <a:pPr>
+              <a:lnSpc>
+                <a:spcPct val="150000"/>
+              </a:lnSpc>
+            </a:pPr>
+            <a:r>
+              <a:rPr lang="hu-HU" dirty="0">
+                <a:solidFill>
+                  <a:schemeClr val="bg1"/>
+                </a:solidFill>
+              </a:rPr>
+              <a:t>Csak megfelelő </a:t>
+            </a:r>
+            <a:r>
+              <a:rPr lang="hu-HU" dirty="0" err="1">
+                <a:solidFill>
+                  <a:schemeClr val="bg1"/>
+                </a:solidFill>
+              </a:rPr>
+              <a:t>Security</a:t>
+            </a:r>
+            <a:r>
+              <a:rPr lang="hu-HU" dirty="0">
+                <a:solidFill>
+                  <a:schemeClr val="bg1"/>
+                </a:solidFill>
+              </a:rPr>
+              <a:t> Group tagjai</a:t>
+            </a:r>
+          </a:p>
+          <a:p>
+            <a:pPr>
+              <a:lnSpc>
+                <a:spcPct val="150000"/>
+              </a:lnSpc>
+            </a:pPr>
+            <a:r>
+              <a:rPr lang="hu-HU" dirty="0">
+                <a:solidFill>
+                  <a:schemeClr val="bg1"/>
+                </a:solidFill>
+              </a:rPr>
+              <a:t>Üzleti indok esetén olvasási jog más részlegeknek</a:t>
+            </a:r>
+          </a:p>
+          <a:p>
+            <a:pPr>
+              <a:lnSpc>
+                <a:spcPct val="150000"/>
+              </a:lnSpc>
+            </a:pPr>
+            <a:r>
+              <a:rPr lang="hu-HU" dirty="0">
+                <a:solidFill>
+                  <a:schemeClr val="bg1"/>
+                </a:solidFill>
+              </a:rPr>
+              <a:t>Legkisebb jogosultság elve</a:t>
+            </a:r>
+          </a:p>
+        </p:txBody>
+      </p:sp>
+      <p:pic>
+        <p:nvPicPr>
+          <p:cNvPr id="6" name="Tartalom helye 5" descr="A képen szöveg, képernyőkép, képernyő, szoftver látható&#10;&#10;Előfordulhat, hogy az AI által létrehozott tartalom helytelen.">
+            <a:extLst>
+              <a:ext uri="{FF2B5EF4-FFF2-40B4-BE49-F238E27FC236}">
+                <a16:creationId xmlns:a16="http://schemas.microsoft.com/office/drawing/2014/main" id="{B3C55AA7-4E09-F98A-D4AB-E290B7BF3D8C}"/>
+              </a:ext>
+            </a:extLst>
+          </p:cNvPr>
+          <p:cNvPicPr>
+            <a:picLocks noGrp="1" noChangeAspect="1"/>
+          </p:cNvPicPr>
+          <p:nvPr>
+            <p:ph sz="half" idx="2"/>
+          </p:nvPr>
+        </p:nvPicPr>
+        <p:blipFill>
+          <a:blip r:embed="rId2">
+            <a:extLst>
+              <a:ext uri="{28A0092B-C50C-407E-A947-70E740481C1C}">
+                <a14:useLocalDpi xmlns:a14="http://schemas.microsoft.com/office/drawing/2010/main" val="0"/>
+              </a:ext>
+            </a:extLst>
+          </a:blip>
+          <a:stretch>
+            <a:fillRect/>
+          </a:stretch>
+        </p:blipFill>
+        <p:spPr>
+          <a:xfrm>
+            <a:off x="4702800" y="1825624"/>
+            <a:ext cx="3429479" cy="4258269"/>
+          </a:xfrm>
+          <a:prstGeom prst="rect">
+            <a:avLst/>
+          </a:prstGeom>
+        </p:spPr>
+      </p:pic>
+      <p:pic>
+        <p:nvPicPr>
+          <p:cNvPr id="11" name="Kép 10" descr="A képen szöveg, képernyőkép, képernyő, szoftver látható&#10;&#10;Előfordulhat, hogy az AI által létrehozott tartalom helytelen.">
+            <a:extLst>
+              <a:ext uri="{FF2B5EF4-FFF2-40B4-BE49-F238E27FC236}">
+                <a16:creationId xmlns:a16="http://schemas.microsoft.com/office/drawing/2014/main" id="{C803D3A1-35A0-1BFE-E381-FA946971F6C1}"/>
+              </a:ext>
+            </a:extLst>
+          </p:cNvPr>
+          <p:cNvPicPr>
+            <a:picLocks noChangeAspect="1"/>
+          </p:cNvPicPr>
+          <p:nvPr/>
+        </p:nvPicPr>
+        <p:blipFill>
+          <a:blip r:embed="rId3">
+            <a:extLst>
+              <a:ext uri="{28A0092B-C50C-407E-A947-70E740481C1C}">
+                <a14:useLocalDpi xmlns:a14="http://schemas.microsoft.com/office/drawing/2010/main" val="0"/>
+              </a:ext>
+            </a:extLst>
+          </a:blip>
+          <a:stretch>
+            <a:fillRect/>
+          </a:stretch>
+        </p:blipFill>
+        <p:spPr>
+          <a:xfrm>
+            <a:off x="8226504" y="1825623"/>
+            <a:ext cx="3419952" cy="4258269"/>
+          </a:xfrm>
+          <a:prstGeom prst="rect">
+            <a:avLst/>
+          </a:prstGeom>
+        </p:spPr>
+      </p:pic>
+    </p:spTree>
+    <p:extLst>
+      <p:ext uri="{BB962C8B-B14F-4D97-AF65-F5344CB8AC3E}">
+        <p14:creationId xmlns:p14="http://schemas.microsoft.com/office/powerpoint/2010/main" val="2640960301"/>
+      </p:ext>
+    </p:extLst>
+  </p:cSld>
+  <p:clrMapOvr>
+    <a:masterClrMapping/>
+  </p:clrMapOvr>
+</p:sld>
+</file>
+
+<file path=ppt/slides/slide15.xml><?xml version="1.0" encoding="utf-8"?>
+<p:sld xmlns:a="http://schemas.openxmlformats.org/drawingml/2006/main" xmlns:r="http://schemas.openxmlformats.org/officeDocument/2006/relationships" xmlns:p="http://schemas.openxmlformats.org/presentationml/2006/main">
+  <p:cSld>
+    <p:spTree>
+      <p:nvGrpSpPr>
+        <p:cNvPr id="1" name=""/>
+        <p:cNvGrpSpPr/>
+        <p:nvPr/>
+      </p:nvGrpSpPr>
+      <p:grpSpPr>
+        <a:xfrm>
+          <a:off x="0" y="0"/>
+          <a:ext cx="0" cy="0"/>
+          <a:chOff x="0" y="0"/>
+          <a:chExt cx="0" cy="0"/>
+        </a:xfrm>
+      </p:grpSpPr>
+      <p:sp>
+        <p:nvSpPr>
+          <p:cNvPr id="2" name="Cím 1">
+            <a:extLst>
+              <a:ext uri="{FF2B5EF4-FFF2-40B4-BE49-F238E27FC236}">
+                <a16:creationId xmlns:a16="http://schemas.microsoft.com/office/drawing/2014/main" id="{85F6B2A4-545F-E3E7-75A7-740D9885C475}"/>
+              </a:ext>
+            </a:extLst>
+          </p:cNvPr>
+          <p:cNvSpPr>
+            <a:spLocks noGrp="1"/>
+          </p:cNvSpPr>
+          <p:nvPr>
+            <p:ph type="title"/>
+          </p:nvPr>
+        </p:nvSpPr>
+        <p:spPr/>
+        <p:txBody>
+          <a:bodyPr/>
+          <a:lstStyle/>
+          <a:p>
+            <a:r>
+              <a:rPr lang="hu-HU" b="1" dirty="0" err="1">
+                <a:solidFill>
+                  <a:schemeClr val="bg1"/>
+                </a:solidFill>
+              </a:rPr>
+              <a:t>Domain</a:t>
+            </a:r>
+            <a:r>
+              <a:rPr lang="hu-HU" b="1" dirty="0">
+                <a:solidFill>
+                  <a:schemeClr val="bg1"/>
+                </a:solidFill>
+              </a:rPr>
+              <a:t> háttérkép</a:t>
+            </a:r>
+          </a:p>
+        </p:txBody>
+      </p:sp>
+      <p:sp>
+        <p:nvSpPr>
+          <p:cNvPr id="3" name="Tartalom helye 2">
+            <a:extLst>
+              <a:ext uri="{FF2B5EF4-FFF2-40B4-BE49-F238E27FC236}">
+                <a16:creationId xmlns:a16="http://schemas.microsoft.com/office/drawing/2014/main" id="{7F78962F-1D46-794A-C3E2-30F5E20331EE}"/>
+              </a:ext>
+            </a:extLst>
+          </p:cNvPr>
+          <p:cNvSpPr>
+            <a:spLocks noGrp="1"/>
+          </p:cNvSpPr>
+          <p:nvPr>
+            <p:ph sz="half" idx="1"/>
+          </p:nvPr>
+        </p:nvSpPr>
+        <p:spPr/>
+        <p:txBody>
+          <a:bodyPr/>
+          <a:lstStyle/>
+          <a:p>
+            <a:pPr>
+              <a:lnSpc>
+                <a:spcPct val="150000"/>
+              </a:lnSpc>
+            </a:pPr>
+            <a:r>
+              <a:rPr lang="hu-HU" dirty="0">
+                <a:solidFill>
+                  <a:schemeClr val="bg1"/>
+                </a:solidFill>
+              </a:rPr>
+              <a:t>Egységes vállalati arculat</a:t>
+            </a:r>
+          </a:p>
+          <a:p>
+            <a:pPr>
+              <a:lnSpc>
+                <a:spcPct val="150000"/>
+              </a:lnSpc>
+            </a:pPr>
+            <a:r>
+              <a:rPr lang="hu-HU" dirty="0">
+                <a:solidFill>
+                  <a:schemeClr val="bg1"/>
+                </a:solidFill>
+              </a:rPr>
+              <a:t>Management exkluzív háttér</a:t>
+            </a:r>
+          </a:p>
+        </p:txBody>
+      </p:sp>
+      <p:pic>
+        <p:nvPicPr>
+          <p:cNvPr id="7" name="Tartalom helye 6" descr="A képen szöveg, képernyőkép, szoftver, szám látható&#10;&#10;Előfordulhat, hogy az AI által létrehozott tartalom helytelen.">
+            <a:extLst>
+              <a:ext uri="{FF2B5EF4-FFF2-40B4-BE49-F238E27FC236}">
+                <a16:creationId xmlns:a16="http://schemas.microsoft.com/office/drawing/2014/main" id="{9D1B7347-1054-02A3-A3B6-D342C88DA800}"/>
+              </a:ext>
+            </a:extLst>
+          </p:cNvPr>
+          <p:cNvPicPr>
+            <a:picLocks noGrp="1" noChangeAspect="1"/>
+          </p:cNvPicPr>
+          <p:nvPr>
+            <p:ph sz="half" idx="2"/>
+          </p:nvPr>
+        </p:nvPicPr>
+        <p:blipFill>
+          <a:blip r:embed="rId2">
+            <a:extLst>
+              <a:ext uri="{28A0092B-C50C-407E-A947-70E740481C1C}">
+                <a14:useLocalDpi xmlns:a14="http://schemas.microsoft.com/office/drawing/2010/main" val="0"/>
+              </a:ext>
+            </a:extLst>
+          </a:blip>
+          <a:stretch>
+            <a:fillRect/>
+          </a:stretch>
+        </p:blipFill>
+        <p:spPr>
+          <a:xfrm>
+            <a:off x="6411484" y="1825625"/>
+            <a:ext cx="4703031" cy="4351338"/>
+          </a:xfrm>
+          <a:prstGeom prst="rect">
+            <a:avLst/>
+          </a:prstGeom>
+        </p:spPr>
+      </p:pic>
+    </p:spTree>
+    <p:extLst>
+      <p:ext uri="{BB962C8B-B14F-4D97-AF65-F5344CB8AC3E}">
+        <p14:creationId xmlns:p14="http://schemas.microsoft.com/office/powerpoint/2010/main" val="3340046965"/>
+      </p:ext>
+    </p:extLst>
+  </p:cSld>
+  <p:clrMapOvr>
+    <a:masterClrMapping/>
+  </p:clrMapOvr>
+</p:sld>
+</file>
+
+<file path=ppt/slides/slide16.xml><?xml version="1.0" encoding="utf-8"?>
+<p:sld xmlns:a="http://schemas.openxmlformats.org/drawingml/2006/main" xmlns:r="http://schemas.openxmlformats.org/officeDocument/2006/relationships" xmlns:p="http://schemas.openxmlformats.org/presentationml/2006/main">
+  <p:cSld>
+    <p:spTree>
+      <p:nvGrpSpPr>
+        <p:cNvPr id="1" name=""/>
+        <p:cNvGrpSpPr/>
+        <p:nvPr/>
+      </p:nvGrpSpPr>
+      <p:grpSpPr>
+        <a:xfrm>
+          <a:off x="0" y="0"/>
+          <a:ext cx="0" cy="0"/>
+          <a:chOff x="0" y="0"/>
+          <a:chExt cx="0" cy="0"/>
+        </a:xfrm>
+      </p:grpSpPr>
+      <p:sp>
+        <p:nvSpPr>
+          <p:cNvPr id="2" name="Cím 1">
+            <a:extLst>
+              <a:ext uri="{FF2B5EF4-FFF2-40B4-BE49-F238E27FC236}">
+                <a16:creationId xmlns:a16="http://schemas.microsoft.com/office/drawing/2014/main" id="{BD358E3E-A774-A605-DD44-FEDFFF9486B5}"/>
+              </a:ext>
+            </a:extLst>
+          </p:cNvPr>
+          <p:cNvSpPr>
+            <a:spLocks noGrp="1"/>
+          </p:cNvSpPr>
+          <p:nvPr>
+            <p:ph type="title"/>
+          </p:nvPr>
+        </p:nvSpPr>
+        <p:spPr/>
+        <p:txBody>
+          <a:bodyPr/>
+          <a:lstStyle/>
+          <a:p>
+            <a:r>
+              <a:rPr lang="hu-HU" b="1" dirty="0">
+                <a:solidFill>
+                  <a:schemeClr val="bg1"/>
+                </a:solidFill>
+              </a:rPr>
+              <a:t>IT részleg GPO</a:t>
+            </a:r>
+          </a:p>
+        </p:txBody>
+      </p:sp>
+      <p:sp>
+        <p:nvSpPr>
+          <p:cNvPr id="3" name="Tartalom helye 2">
+            <a:extLst>
+              <a:ext uri="{FF2B5EF4-FFF2-40B4-BE49-F238E27FC236}">
+                <a16:creationId xmlns:a16="http://schemas.microsoft.com/office/drawing/2014/main" id="{E867CC6E-F9F9-E629-1893-6810391DE1B9}"/>
+              </a:ext>
+            </a:extLst>
+          </p:cNvPr>
+          <p:cNvSpPr>
+            <a:spLocks noGrp="1"/>
+          </p:cNvSpPr>
+          <p:nvPr>
+            <p:ph sz="half" idx="1"/>
+          </p:nvPr>
+        </p:nvSpPr>
+        <p:spPr/>
+        <p:txBody>
+          <a:bodyPr/>
+          <a:lstStyle/>
+          <a:p>
+            <a:pPr>
+              <a:lnSpc>
+                <a:spcPct val="150000"/>
+              </a:lnSpc>
+            </a:pPr>
+            <a:r>
+              <a:rPr lang="fi-FI" dirty="0">
+                <a:solidFill>
+                  <a:schemeClr val="bg1"/>
+                </a:solidFill>
+              </a:rPr>
+              <a:t>WinSCP telepítés</a:t>
+            </a:r>
+            <a:endParaRPr lang="hu-HU" dirty="0">
+              <a:solidFill>
+                <a:schemeClr val="bg1"/>
+              </a:solidFill>
+            </a:endParaRPr>
+          </a:p>
+          <a:p>
+            <a:pPr>
+              <a:lnSpc>
+                <a:spcPct val="150000"/>
+              </a:lnSpc>
+            </a:pPr>
+            <a:r>
+              <a:rPr lang="fi-FI" dirty="0">
+                <a:solidFill>
+                  <a:schemeClr val="bg1"/>
+                </a:solidFill>
+              </a:rPr>
+              <a:t>PuTTY telepítés</a:t>
+            </a:r>
+            <a:endParaRPr lang="hu-HU" dirty="0">
+              <a:solidFill>
+                <a:schemeClr val="bg1"/>
+              </a:solidFill>
+            </a:endParaRPr>
+          </a:p>
+          <a:p>
+            <a:pPr>
+              <a:lnSpc>
+                <a:spcPct val="150000"/>
+              </a:lnSpc>
+            </a:pPr>
+            <a:r>
+              <a:rPr lang="hu-HU" dirty="0">
+                <a:solidFill>
+                  <a:schemeClr val="bg1"/>
+                </a:solidFill>
+              </a:rPr>
+              <a:t>Előre jóváhagyott csomagok kézzel indított telepítése</a:t>
+            </a:r>
+          </a:p>
+        </p:txBody>
+      </p:sp>
+      <p:pic>
+        <p:nvPicPr>
+          <p:cNvPr id="7" name="Tartalom helye 6" descr="A képen szöveg, képernyőkép, szoftver, képernyő látható&#10;&#10;Előfordulhat, hogy az AI által létrehozott tartalom helytelen.">
+            <a:extLst>
+              <a:ext uri="{FF2B5EF4-FFF2-40B4-BE49-F238E27FC236}">
+                <a16:creationId xmlns:a16="http://schemas.microsoft.com/office/drawing/2014/main" id="{36A61F77-F60E-1E22-2EE8-2AE60920D832}"/>
+              </a:ext>
+            </a:extLst>
+          </p:cNvPr>
+          <p:cNvPicPr>
+            <a:picLocks noGrp="1" noChangeAspect="1"/>
+          </p:cNvPicPr>
+          <p:nvPr>
+            <p:ph sz="half" idx="2"/>
+          </p:nvPr>
+        </p:nvPicPr>
+        <p:blipFill>
+          <a:blip r:embed="rId2">
+            <a:extLst>
+              <a:ext uri="{28A0092B-C50C-407E-A947-70E740481C1C}">
+                <a14:useLocalDpi xmlns:a14="http://schemas.microsoft.com/office/drawing/2010/main" val="0"/>
+              </a:ext>
+            </a:extLst>
+          </a:blip>
+          <a:stretch>
+            <a:fillRect/>
+          </a:stretch>
+        </p:blipFill>
+        <p:spPr>
+          <a:xfrm>
+            <a:off x="5980016" y="2093976"/>
+            <a:ext cx="5373784" cy="3682923"/>
+          </a:xfrm>
+          <a:prstGeom prst="rect">
+            <a:avLst/>
+          </a:prstGeom>
+        </p:spPr>
+      </p:pic>
+    </p:spTree>
+    <p:extLst>
+      <p:ext uri="{BB962C8B-B14F-4D97-AF65-F5344CB8AC3E}">
+        <p14:creationId xmlns:p14="http://schemas.microsoft.com/office/powerpoint/2010/main" val="2559301725"/>
+      </p:ext>
+    </p:extLst>
+  </p:cSld>
+  <p:clrMapOvr>
+    <a:masterClrMapping/>
+  </p:clrMapOvr>
+</p:sld>
+</file>
+
+<file path=ppt/slides/slide17.xml><?xml version="1.0" encoding="utf-8"?>
+<p:sld xmlns:a="http://schemas.openxmlformats.org/drawingml/2006/main" xmlns:r="http://schemas.openxmlformats.org/officeDocument/2006/relationships" xmlns:p="http://schemas.openxmlformats.org/presentationml/2006/main">
+  <p:cSld>
+    <p:spTree>
+      <p:nvGrpSpPr>
+        <p:cNvPr id="1" name=""/>
+        <p:cNvGrpSpPr/>
+        <p:nvPr/>
+      </p:nvGrpSpPr>
+      <p:grpSpPr>
+        <a:xfrm>
+          <a:off x="0" y="0"/>
+          <a:ext cx="0" cy="0"/>
+          <a:chOff x="0" y="0"/>
+          <a:chExt cx="0" cy="0"/>
+        </a:xfrm>
+      </p:grpSpPr>
+      <p:sp>
+        <p:nvSpPr>
+          <p:cNvPr id="2" name="Cím 1">
+            <a:extLst>
+              <a:ext uri="{FF2B5EF4-FFF2-40B4-BE49-F238E27FC236}">
+                <a16:creationId xmlns:a16="http://schemas.microsoft.com/office/drawing/2014/main" id="{E0F7CBD3-B211-2E00-873C-212BDE89891F}"/>
+              </a:ext>
+            </a:extLst>
+          </p:cNvPr>
+          <p:cNvSpPr>
+            <a:spLocks noGrp="1"/>
+          </p:cNvSpPr>
+          <p:nvPr>
+            <p:ph type="title"/>
+          </p:nvPr>
+        </p:nvSpPr>
+        <p:spPr/>
+        <p:txBody>
+          <a:bodyPr/>
+          <a:lstStyle/>
+          <a:p>
+            <a:r>
+              <a:rPr lang="hu-HU" b="1" dirty="0">
+                <a:solidFill>
+                  <a:schemeClr val="bg1"/>
+                </a:solidFill>
+              </a:rPr>
+              <a:t>MSSQL </a:t>
+            </a:r>
+            <a:r>
+              <a:rPr lang="hu-HU" b="1" dirty="0" err="1">
+                <a:solidFill>
+                  <a:schemeClr val="bg1"/>
+                </a:solidFill>
+              </a:rPr>
+              <a:t>Always</a:t>
+            </a:r>
+            <a:r>
+              <a:rPr lang="hu-HU" b="1" dirty="0">
+                <a:solidFill>
+                  <a:schemeClr val="bg1"/>
+                </a:solidFill>
+              </a:rPr>
+              <a:t> </a:t>
+            </a:r>
+            <a:r>
+              <a:rPr lang="hu-HU" b="1" dirty="0" err="1">
+                <a:solidFill>
+                  <a:schemeClr val="bg1"/>
+                </a:solidFill>
+              </a:rPr>
+              <a:t>On</a:t>
+            </a:r>
+            <a:r>
+              <a:rPr lang="hu-HU" b="1" dirty="0">
+                <a:solidFill>
+                  <a:schemeClr val="bg1"/>
+                </a:solidFill>
+              </a:rPr>
+              <a:t> </a:t>
+            </a:r>
+            <a:r>
+              <a:rPr lang="hu-HU" b="1" dirty="0" err="1">
+                <a:solidFill>
+                  <a:schemeClr val="bg1"/>
+                </a:solidFill>
+              </a:rPr>
+              <a:t>High</a:t>
+            </a:r>
+            <a:r>
+              <a:rPr lang="hu-HU" b="1" dirty="0">
+                <a:solidFill>
+                  <a:schemeClr val="bg1"/>
+                </a:solidFill>
+              </a:rPr>
+              <a:t> </a:t>
+            </a:r>
+            <a:r>
+              <a:rPr lang="hu-HU" b="1" dirty="0" err="1">
+                <a:solidFill>
+                  <a:schemeClr val="bg1"/>
+                </a:solidFill>
+              </a:rPr>
+              <a:t>Availability</a:t>
+            </a:r>
+            <a:endParaRPr lang="hu-HU" b="1" dirty="0">
+              <a:solidFill>
+                <a:schemeClr val="bg1"/>
+              </a:solidFill>
+            </a:endParaRPr>
+          </a:p>
+        </p:txBody>
+      </p:sp>
+      <p:sp>
+        <p:nvSpPr>
+          <p:cNvPr id="3" name="Tartalom helye 2">
+            <a:extLst>
+              <a:ext uri="{FF2B5EF4-FFF2-40B4-BE49-F238E27FC236}">
+                <a16:creationId xmlns:a16="http://schemas.microsoft.com/office/drawing/2014/main" id="{68397D94-FE7E-0DD4-0C1B-B17B005DF3A3}"/>
+              </a:ext>
+            </a:extLst>
+          </p:cNvPr>
+          <p:cNvSpPr>
+            <a:spLocks noGrp="1"/>
+          </p:cNvSpPr>
+          <p:nvPr>
+            <p:ph idx="1"/>
+          </p:nvPr>
+        </p:nvSpPr>
+        <p:spPr/>
+        <p:txBody>
+          <a:bodyPr/>
+          <a:lstStyle/>
+          <a:p>
+            <a:pPr>
+              <a:lnSpc>
+                <a:spcPct val="150000"/>
+              </a:lnSpc>
+            </a:pPr>
+            <a:r>
+              <a:rPr lang="hu-HU" dirty="0">
+                <a:solidFill>
+                  <a:schemeClr val="bg1"/>
+                </a:solidFill>
+              </a:rPr>
+              <a:t>Üzleti szempontból kritikus adatbázisok</a:t>
+            </a:r>
+          </a:p>
+          <a:p>
+            <a:pPr>
+              <a:lnSpc>
+                <a:spcPct val="150000"/>
+              </a:lnSpc>
+            </a:pPr>
+            <a:r>
+              <a:rPr lang="hu-HU" dirty="0">
+                <a:solidFill>
+                  <a:schemeClr val="bg1"/>
+                </a:solidFill>
+              </a:rPr>
+              <a:t>24/7 működés</a:t>
+            </a:r>
+          </a:p>
+          <a:p>
+            <a:pPr>
+              <a:lnSpc>
+                <a:spcPct val="150000"/>
+              </a:lnSpc>
+            </a:pPr>
+            <a:r>
+              <a:rPr lang="hu-HU" dirty="0">
+                <a:solidFill>
+                  <a:schemeClr val="bg1"/>
+                </a:solidFill>
+              </a:rPr>
+              <a:t>Adatvesztés nem megengedett</a:t>
+            </a:r>
+          </a:p>
+        </p:txBody>
+      </p:sp>
+    </p:spTree>
+    <p:extLst>
+      <p:ext uri="{BB962C8B-B14F-4D97-AF65-F5344CB8AC3E}">
+        <p14:creationId xmlns:p14="http://schemas.microsoft.com/office/powerpoint/2010/main" val="25851739"/>
+      </p:ext>
+    </p:extLst>
+  </p:cSld>
+  <p:clrMapOvr>
+    <a:masterClrMapping/>
+  </p:clrMapOvr>
+</p:sld>
+</file>
+
+<file path=ppt/slides/slide18.xml><?xml version="1.0" encoding="utf-8"?>
+<p:sld xmlns:a="http://schemas.openxmlformats.org/drawingml/2006/main" xmlns:r="http://schemas.openxmlformats.org/officeDocument/2006/relationships" xmlns:p="http://schemas.openxmlformats.org/presentationml/2006/main">
+  <p:cSld>
+    <p:spTree>
+      <p:nvGrpSpPr>
+        <p:cNvPr id="1" name=""/>
+        <p:cNvGrpSpPr/>
+        <p:nvPr/>
+      </p:nvGrpSpPr>
+      <p:grpSpPr>
+        <a:xfrm>
+          <a:off x="0" y="0"/>
+          <a:ext cx="0" cy="0"/>
+          <a:chOff x="0" y="0"/>
+          <a:chExt cx="0" cy="0"/>
+        </a:xfrm>
+      </p:grpSpPr>
+      <p:sp>
+        <p:nvSpPr>
+          <p:cNvPr id="2" name="Cím 1">
+            <a:extLst>
+              <a:ext uri="{FF2B5EF4-FFF2-40B4-BE49-F238E27FC236}">
+                <a16:creationId xmlns:a16="http://schemas.microsoft.com/office/drawing/2014/main" id="{AA98558B-E10D-351C-D965-D104BFFF2A69}"/>
+              </a:ext>
+            </a:extLst>
+          </p:cNvPr>
+          <p:cNvSpPr>
+            <a:spLocks noGrp="1"/>
+          </p:cNvSpPr>
+          <p:nvPr>
+            <p:ph type="title"/>
+          </p:nvPr>
+        </p:nvSpPr>
+        <p:spPr/>
+        <p:txBody>
+          <a:bodyPr/>
+          <a:lstStyle/>
+          <a:p>
+            <a:r>
+              <a:rPr lang="hu-HU" b="1" dirty="0">
+                <a:solidFill>
+                  <a:schemeClr val="bg1"/>
+                </a:solidFill>
+              </a:rPr>
+              <a:t>Architektúra</a:t>
+            </a:r>
+          </a:p>
+        </p:txBody>
+      </p:sp>
+      <p:sp>
+        <p:nvSpPr>
+          <p:cNvPr id="3" name="Tartalom helye 2">
+            <a:extLst>
+              <a:ext uri="{FF2B5EF4-FFF2-40B4-BE49-F238E27FC236}">
+                <a16:creationId xmlns:a16="http://schemas.microsoft.com/office/drawing/2014/main" id="{6396CD03-181E-F6C9-1D3C-C255C4316744}"/>
+              </a:ext>
+            </a:extLst>
+          </p:cNvPr>
+          <p:cNvSpPr>
+            <a:spLocks noGrp="1"/>
+          </p:cNvSpPr>
+          <p:nvPr>
+            <p:ph sz="half" idx="1"/>
+          </p:nvPr>
+        </p:nvSpPr>
+        <p:spPr>
+          <a:xfrm>
+            <a:off x="838200" y="1825624"/>
+            <a:ext cx="5181600" cy="4575175"/>
+          </a:xfrm>
+        </p:spPr>
+        <p:txBody>
+          <a:bodyPr>
+            <a:normAutofit/>
+          </a:bodyPr>
+          <a:lstStyle/>
+          <a:p>
+            <a:pPr>
+              <a:lnSpc>
+                <a:spcPct val="150000"/>
+              </a:lnSpc>
+            </a:pPr>
+            <a:r>
+              <a:rPr lang="en-US" dirty="0">
+                <a:solidFill>
+                  <a:schemeClr val="bg1"/>
+                </a:solidFill>
+              </a:rPr>
+              <a:t>2 SQL node</a:t>
+            </a:r>
+            <a:endParaRPr lang="hu-HU" dirty="0">
+              <a:solidFill>
+                <a:schemeClr val="bg1"/>
+              </a:solidFill>
+            </a:endParaRPr>
+          </a:p>
+          <a:p>
+            <a:pPr>
+              <a:lnSpc>
+                <a:spcPct val="150000"/>
+              </a:lnSpc>
+            </a:pPr>
+            <a:r>
+              <a:rPr lang="en-US" dirty="0">
+                <a:solidFill>
+                  <a:schemeClr val="bg1"/>
+                </a:solidFill>
+              </a:rPr>
+              <a:t>Windows Server Failover Cluster</a:t>
+            </a:r>
+            <a:endParaRPr lang="hu-HU" dirty="0">
+              <a:solidFill>
+                <a:schemeClr val="bg1"/>
+              </a:solidFill>
+            </a:endParaRPr>
+          </a:p>
+          <a:p>
+            <a:pPr>
+              <a:lnSpc>
+                <a:spcPct val="150000"/>
+              </a:lnSpc>
+            </a:pPr>
+            <a:r>
+              <a:rPr lang="en-US" dirty="0">
+                <a:solidFill>
+                  <a:schemeClr val="bg1"/>
+                </a:solidFill>
+              </a:rPr>
+              <a:t>Availability Group</a:t>
+            </a:r>
+            <a:endParaRPr lang="hu-HU" dirty="0">
+              <a:solidFill>
+                <a:schemeClr val="bg1"/>
+              </a:solidFill>
+            </a:endParaRPr>
+          </a:p>
+          <a:p>
+            <a:pPr>
+              <a:lnSpc>
+                <a:spcPct val="150000"/>
+              </a:lnSpc>
+            </a:pPr>
+            <a:r>
+              <a:rPr lang="en-US" dirty="0">
+                <a:solidFill>
+                  <a:schemeClr val="bg1"/>
+                </a:solidFill>
+              </a:rPr>
+              <a:t>Listener</a:t>
+            </a:r>
+            <a:endParaRPr lang="hu-HU" dirty="0">
+              <a:solidFill>
+                <a:schemeClr val="bg1"/>
+              </a:solidFill>
+            </a:endParaRPr>
+          </a:p>
+          <a:p>
+            <a:pPr>
+              <a:lnSpc>
+                <a:spcPct val="150000"/>
+              </a:lnSpc>
+            </a:pPr>
+            <a:r>
+              <a:rPr lang="hu-HU" dirty="0">
+                <a:solidFill>
+                  <a:schemeClr val="bg1"/>
+                </a:solidFill>
+              </a:rPr>
+              <a:t>File </a:t>
+            </a:r>
+            <a:r>
+              <a:rPr lang="hu-HU" dirty="0" err="1">
+                <a:solidFill>
+                  <a:schemeClr val="bg1"/>
+                </a:solidFill>
+              </a:rPr>
+              <a:t>Share</a:t>
+            </a:r>
+            <a:r>
+              <a:rPr lang="hu-HU" dirty="0">
+                <a:solidFill>
+                  <a:schemeClr val="bg1"/>
+                </a:solidFill>
+              </a:rPr>
+              <a:t> </a:t>
+            </a:r>
+            <a:r>
+              <a:rPr lang="hu-HU" dirty="0" err="1">
+                <a:solidFill>
+                  <a:schemeClr val="bg1"/>
+                </a:solidFill>
+              </a:rPr>
+              <a:t>Witness</a:t>
+            </a:r>
+            <a:endParaRPr lang="hu-HU" dirty="0">
+              <a:solidFill>
+                <a:schemeClr val="bg1"/>
+              </a:solidFill>
+            </a:endParaRPr>
+          </a:p>
+        </p:txBody>
+      </p:sp>
+      <p:pic>
+        <p:nvPicPr>
+          <p:cNvPr id="7" name="Tartalom helye 6" descr="A képen szöveg, szoftver, képernyőkép, Számítógépes ikon látható&#10;&#10;Előfordulhat, hogy az AI által létrehozott tartalom helytelen.">
+            <a:extLst>
+              <a:ext uri="{FF2B5EF4-FFF2-40B4-BE49-F238E27FC236}">
+                <a16:creationId xmlns:a16="http://schemas.microsoft.com/office/drawing/2014/main" id="{9FE50502-CB52-CBDD-772B-EE6EE399E9C0}"/>
+              </a:ext>
+            </a:extLst>
+          </p:cNvPr>
+          <p:cNvPicPr>
+            <a:picLocks noGrp="1" noChangeAspect="1"/>
+          </p:cNvPicPr>
+          <p:nvPr>
+            <p:ph sz="half" idx="2"/>
+          </p:nvPr>
+        </p:nvPicPr>
+        <p:blipFill>
+          <a:blip r:embed="rId2">
+            <a:extLst>
+              <a:ext uri="{28A0092B-C50C-407E-A947-70E740481C1C}">
+                <a14:useLocalDpi xmlns:a14="http://schemas.microsoft.com/office/drawing/2010/main" val="0"/>
+              </a:ext>
+            </a:extLst>
+          </a:blip>
+          <a:stretch>
+            <a:fillRect/>
+          </a:stretch>
+        </p:blipFill>
+        <p:spPr>
+          <a:xfrm>
+            <a:off x="5337790" y="1027906"/>
+            <a:ext cx="5869703" cy="2008975"/>
+          </a:xfrm>
+          <a:prstGeom prst="rect">
+            <a:avLst/>
+          </a:prstGeom>
+        </p:spPr>
+      </p:pic>
+      <p:pic>
+        <p:nvPicPr>
+          <p:cNvPr id="13" name="Kép 12" descr="A képen szöveg, képernyőkép, szoftver, Számítógépes ikon látható&#10;&#10;Előfordulhat, hogy az AI által létrehozott tartalom helytelen.">
+            <a:extLst>
+              <a:ext uri="{FF2B5EF4-FFF2-40B4-BE49-F238E27FC236}">
+                <a16:creationId xmlns:a16="http://schemas.microsoft.com/office/drawing/2014/main" id="{7A68B0AB-726F-74B3-0CE5-59139D231C65}"/>
+              </a:ext>
+            </a:extLst>
+          </p:cNvPr>
+          <p:cNvPicPr>
+            <a:picLocks noChangeAspect="1"/>
+          </p:cNvPicPr>
+          <p:nvPr/>
+        </p:nvPicPr>
+        <p:blipFill>
+          <a:blip r:embed="rId3">
+            <a:extLst>
+              <a:ext uri="{28A0092B-C50C-407E-A947-70E740481C1C}">
+                <a14:useLocalDpi xmlns:a14="http://schemas.microsoft.com/office/drawing/2010/main" val="0"/>
+              </a:ext>
+            </a:extLst>
+          </a:blip>
+          <a:stretch>
+            <a:fillRect/>
+          </a:stretch>
+        </p:blipFill>
+        <p:spPr>
+          <a:xfrm>
+            <a:off x="5337790" y="3195153"/>
+            <a:ext cx="5869703" cy="2981810"/>
+          </a:xfrm>
+          <a:prstGeom prst="rect">
+            <a:avLst/>
+          </a:prstGeom>
+        </p:spPr>
+      </p:pic>
+    </p:spTree>
+    <p:extLst>
+      <p:ext uri="{BB962C8B-B14F-4D97-AF65-F5344CB8AC3E}">
+        <p14:creationId xmlns:p14="http://schemas.microsoft.com/office/powerpoint/2010/main" val="3960847093"/>
+      </p:ext>
+    </p:extLst>
+  </p:cSld>
+  <p:clrMapOvr>
+    <a:masterClrMapping/>
+  </p:clrMapOvr>
+</p:sld>
+</file>
+
+<file path=ppt/slides/slide19.xml><?xml version="1.0" encoding="utf-8"?>
+<p:sld xmlns:a="http://schemas.openxmlformats.org/drawingml/2006/main" xmlns:r="http://schemas.openxmlformats.org/officeDocument/2006/relationships" xmlns:p="http://schemas.openxmlformats.org/presentationml/2006/main">
+  <p:cSld>
+    <p:spTree>
+      <p:nvGrpSpPr>
+        <p:cNvPr id="1" name=""/>
+        <p:cNvGrpSpPr/>
+        <p:nvPr/>
+      </p:nvGrpSpPr>
+      <p:grpSpPr>
+        <a:xfrm>
+          <a:off x="0" y="0"/>
+          <a:ext cx="0" cy="0"/>
+          <a:chOff x="0" y="0"/>
+          <a:chExt cx="0" cy="0"/>
+        </a:xfrm>
+      </p:grpSpPr>
+      <p:sp>
+        <p:nvSpPr>
+          <p:cNvPr id="2" name="Cím 1">
+            <a:extLst>
+              <a:ext uri="{FF2B5EF4-FFF2-40B4-BE49-F238E27FC236}">
+                <a16:creationId xmlns:a16="http://schemas.microsoft.com/office/drawing/2014/main" id="{5D82287E-A13C-B8F3-C901-68E2664AD1A2}"/>
+              </a:ext>
+            </a:extLst>
+          </p:cNvPr>
+          <p:cNvSpPr>
+            <a:spLocks noGrp="1"/>
+          </p:cNvSpPr>
+          <p:nvPr>
+            <p:ph type="title"/>
+          </p:nvPr>
+        </p:nvSpPr>
+        <p:spPr/>
+        <p:txBody>
+          <a:bodyPr/>
+          <a:lstStyle/>
+          <a:p>
+            <a:r>
+              <a:rPr lang="hu-HU" b="1" dirty="0">
+                <a:solidFill>
+                  <a:schemeClr val="bg1"/>
+                </a:solidFill>
+              </a:rPr>
+              <a:t>Működés</a:t>
+            </a:r>
+          </a:p>
+        </p:txBody>
+      </p:sp>
+      <p:sp>
+        <p:nvSpPr>
+          <p:cNvPr id="3" name="Tartalom helye 2">
+            <a:extLst>
+              <a:ext uri="{FF2B5EF4-FFF2-40B4-BE49-F238E27FC236}">
+                <a16:creationId xmlns:a16="http://schemas.microsoft.com/office/drawing/2014/main" id="{063F7A80-03CF-B27D-A5A6-1E47275850CC}"/>
+              </a:ext>
+            </a:extLst>
+          </p:cNvPr>
+          <p:cNvSpPr>
+            <a:spLocks noGrp="1"/>
+          </p:cNvSpPr>
+          <p:nvPr>
+            <p:ph sz="half" idx="1"/>
+          </p:nvPr>
+        </p:nvSpPr>
+        <p:spPr/>
+        <p:txBody>
+          <a:bodyPr/>
+          <a:lstStyle/>
+          <a:p>
+            <a:pPr>
+              <a:lnSpc>
+                <a:spcPct val="150000"/>
+              </a:lnSpc>
+            </a:pPr>
+            <a:r>
+              <a:rPr lang="hu-HU" dirty="0">
+                <a:solidFill>
+                  <a:schemeClr val="bg1"/>
+                </a:solidFill>
+              </a:rPr>
+              <a:t>Szinkron replikáció</a:t>
+            </a:r>
+          </a:p>
+          <a:p>
+            <a:pPr>
+              <a:lnSpc>
+                <a:spcPct val="150000"/>
+              </a:lnSpc>
+            </a:pPr>
+            <a:r>
+              <a:rPr lang="hu-HU" dirty="0" err="1">
+                <a:solidFill>
+                  <a:schemeClr val="bg1"/>
+                </a:solidFill>
+              </a:rPr>
+              <a:t>Automatic</a:t>
+            </a:r>
+            <a:r>
+              <a:rPr lang="hu-HU" dirty="0">
+                <a:solidFill>
+                  <a:schemeClr val="bg1"/>
+                </a:solidFill>
+              </a:rPr>
+              <a:t> </a:t>
+            </a:r>
+            <a:r>
+              <a:rPr lang="hu-HU" dirty="0" err="1">
+                <a:solidFill>
+                  <a:schemeClr val="bg1"/>
+                </a:solidFill>
+              </a:rPr>
+              <a:t>failover</a:t>
+            </a:r>
+            <a:endParaRPr lang="hu-HU" dirty="0">
+              <a:solidFill>
+                <a:schemeClr val="bg1"/>
+              </a:solidFill>
+            </a:endParaRPr>
+          </a:p>
+          <a:p>
+            <a:pPr>
+              <a:lnSpc>
+                <a:spcPct val="150000"/>
+              </a:lnSpc>
+            </a:pPr>
+            <a:r>
+              <a:rPr lang="hu-HU" dirty="0" err="1">
+                <a:solidFill>
+                  <a:schemeClr val="bg1"/>
+                </a:solidFill>
+              </a:rPr>
+              <a:t>Automatic</a:t>
+            </a:r>
+            <a:r>
+              <a:rPr lang="hu-HU" dirty="0">
+                <a:solidFill>
+                  <a:schemeClr val="bg1"/>
+                </a:solidFill>
+              </a:rPr>
+              <a:t> </a:t>
+            </a:r>
+            <a:r>
+              <a:rPr lang="hu-HU" dirty="0" err="1">
+                <a:solidFill>
+                  <a:schemeClr val="bg1"/>
+                </a:solidFill>
+              </a:rPr>
+              <a:t>seeding</a:t>
+            </a:r>
+            <a:endParaRPr lang="hu-HU" dirty="0">
+              <a:solidFill>
+                <a:schemeClr val="bg1"/>
+              </a:solidFill>
+            </a:endParaRPr>
+          </a:p>
+          <a:p>
+            <a:pPr>
+              <a:lnSpc>
+                <a:spcPct val="150000"/>
+              </a:lnSpc>
+            </a:pPr>
+            <a:r>
+              <a:rPr lang="hu-HU" dirty="0" err="1">
+                <a:solidFill>
+                  <a:schemeClr val="bg1"/>
+                </a:solidFill>
+              </a:rPr>
+              <a:t>Listener</a:t>
+            </a:r>
+            <a:r>
+              <a:rPr lang="hu-HU" dirty="0">
+                <a:solidFill>
+                  <a:schemeClr val="bg1"/>
+                </a:solidFill>
+              </a:rPr>
+              <a:t> IP</a:t>
+            </a:r>
+          </a:p>
+        </p:txBody>
+      </p:sp>
+      <p:pic>
+        <p:nvPicPr>
+          <p:cNvPr id="7" name="Tartalom helye 6" descr="A képen szöveg, képernyőkép, Betűtípus, szám látható&#10;&#10;Előfordulhat, hogy az AI által létrehozott tartalom helytelen.">
+            <a:extLst>
+              <a:ext uri="{FF2B5EF4-FFF2-40B4-BE49-F238E27FC236}">
+                <a16:creationId xmlns:a16="http://schemas.microsoft.com/office/drawing/2014/main" id="{169774EF-06AB-8748-3478-9087CCB5CBC0}"/>
+              </a:ext>
+            </a:extLst>
+          </p:cNvPr>
+          <p:cNvPicPr>
+            <a:picLocks noGrp="1" noChangeAspect="1"/>
+          </p:cNvPicPr>
+          <p:nvPr>
+            <p:ph sz="half" idx="2"/>
+          </p:nvPr>
+        </p:nvPicPr>
+        <p:blipFill>
+          <a:blip r:embed="rId2">
+            <a:extLst>
+              <a:ext uri="{28A0092B-C50C-407E-A947-70E740481C1C}">
+                <a14:useLocalDpi xmlns:a14="http://schemas.microsoft.com/office/drawing/2010/main" val="0"/>
+              </a:ext>
+            </a:extLst>
+          </a:blip>
+          <a:stretch>
+            <a:fillRect/>
+          </a:stretch>
+        </p:blipFill>
+        <p:spPr>
+          <a:xfrm>
+            <a:off x="9436608" y="311659"/>
+            <a:ext cx="2392377" cy="6234681"/>
+          </a:xfrm>
+          <a:prstGeom prst="rect">
+            <a:avLst/>
+          </a:prstGeom>
+        </p:spPr>
+      </p:pic>
+      <p:pic>
+        <p:nvPicPr>
+          <p:cNvPr id="9" name="Kép 8" descr="A képen szöveg, képernyőkép, szoftver, Számítógépes ikon látható&#10;&#10;Előfordulhat, hogy az AI által létrehozott tartalom helytelen.">
+            <a:extLst>
+              <a:ext uri="{FF2B5EF4-FFF2-40B4-BE49-F238E27FC236}">
+                <a16:creationId xmlns:a16="http://schemas.microsoft.com/office/drawing/2014/main" id="{C49C6E86-B3E8-489B-932A-6F4C85848728}"/>
+              </a:ext>
+            </a:extLst>
+          </p:cNvPr>
+          <p:cNvPicPr>
+            <a:picLocks noChangeAspect="1"/>
+          </p:cNvPicPr>
+          <p:nvPr/>
+        </p:nvPicPr>
+        <p:blipFill>
+          <a:blip r:embed="rId3">
+            <a:extLst>
+              <a:ext uri="{28A0092B-C50C-407E-A947-70E740481C1C}">
+                <a14:useLocalDpi xmlns:a14="http://schemas.microsoft.com/office/drawing/2010/main" val="0"/>
+              </a:ext>
+            </a:extLst>
+          </a:blip>
+          <a:stretch>
+            <a:fillRect/>
+          </a:stretch>
+        </p:blipFill>
+        <p:spPr>
+          <a:xfrm>
+            <a:off x="4668726" y="1690688"/>
+            <a:ext cx="4615111" cy="4280778"/>
+          </a:xfrm>
+          <a:prstGeom prst="rect">
+            <a:avLst/>
+          </a:prstGeom>
+        </p:spPr>
+      </p:pic>
+    </p:spTree>
+    <p:extLst>
+      <p:ext uri="{BB962C8B-B14F-4D97-AF65-F5344CB8AC3E}">
+        <p14:creationId xmlns:p14="http://schemas.microsoft.com/office/powerpoint/2010/main" val="733097828"/>
+      </p:ext>
+    </p:extLst>
+  </p:cSld>
+  <p:clrMapOvr>
+    <a:masterClrMapping/>
+  </p:clrMapOvr>
+</p:sld>
+</file>
+
+<file path=ppt/slides/slide2.xml><?xml version="1.0" encoding="utf-8"?>
+<p:sld xmlns:a="http://schemas.openxmlformats.org/drawingml/2006/main" xmlns:r="http://schemas.openxmlformats.org/officeDocument/2006/relationships" xmlns:p="http://schemas.openxmlformats.org/presentationml/2006/main">
+  <p:cSld>
+    <p:spTree>
+      <p:nvGrpSpPr>
+        <p:cNvPr id="1" name=""/>
+        <p:cNvGrpSpPr/>
+        <p:nvPr/>
+      </p:nvGrpSpPr>
+      <p:grpSpPr>
+        <a:xfrm>
+          <a:off x="0" y="0"/>
+          <a:ext cx="0" cy="0"/>
+          <a:chOff x="0" y="0"/>
+          <a:chExt cx="0" cy="0"/>
+        </a:xfrm>
+      </p:grpSpPr>
+      <p:sp>
+        <p:nvSpPr>
+          <p:cNvPr id="2" name="Cím 1">
+            <a:extLst>
+              <a:ext uri="{FF2B5EF4-FFF2-40B4-BE49-F238E27FC236}">
+                <a16:creationId xmlns:a16="http://schemas.microsoft.com/office/drawing/2014/main" id="{688DBFB1-510C-106F-0883-62F8B2F62A96}"/>
+              </a:ext>
+            </a:extLst>
+          </p:cNvPr>
+          <p:cNvSpPr>
+            <a:spLocks noGrp="1"/>
+          </p:cNvSpPr>
+          <p:nvPr>
+            <p:ph type="title"/>
+          </p:nvPr>
+        </p:nvSpPr>
+        <p:spPr/>
+        <p:txBody>
+          <a:bodyPr/>
+          <a:lstStyle/>
+          <a:p>
+            <a:r>
+              <a:rPr lang="hu-HU" b="1" dirty="0">
+                <a:solidFill>
+                  <a:schemeClr val="bg1"/>
+                </a:solidFill>
+              </a:rPr>
+              <a:t>Bemutatkozás</a:t>
+            </a:r>
+          </a:p>
+        </p:txBody>
+      </p:sp>
+      <p:sp>
+        <p:nvSpPr>
+          <p:cNvPr id="3" name="Tartalom helye 2">
+            <a:extLst>
+              <a:ext uri="{FF2B5EF4-FFF2-40B4-BE49-F238E27FC236}">
+                <a16:creationId xmlns:a16="http://schemas.microsoft.com/office/drawing/2014/main" id="{0B5EE22A-F329-F075-6408-09D4D8D8C959}"/>
+              </a:ext>
+            </a:extLst>
+          </p:cNvPr>
+          <p:cNvSpPr>
+            <a:spLocks noGrp="1"/>
+          </p:cNvSpPr>
+          <p:nvPr>
+            <p:ph idx="1"/>
+          </p:nvPr>
+        </p:nvSpPr>
+        <p:spPr/>
+        <p:txBody>
+          <a:bodyPr/>
+          <a:lstStyle/>
+          <a:p>
+            <a:pPr>
+              <a:lnSpc>
+                <a:spcPct val="150000"/>
+              </a:lnSpc>
+            </a:pPr>
+            <a:r>
+              <a:rPr lang="hu-HU" dirty="0">
+                <a:solidFill>
+                  <a:schemeClr val="bg1"/>
+                </a:solidFill>
+              </a:rPr>
+              <a:t>Prémium mechanikus és okosórák gyártása</a:t>
+            </a:r>
+          </a:p>
+          <a:p>
+            <a:pPr>
+              <a:lnSpc>
+                <a:spcPct val="150000"/>
+              </a:lnSpc>
+            </a:pPr>
+            <a:r>
+              <a:rPr lang="hu-HU" dirty="0">
+                <a:solidFill>
+                  <a:schemeClr val="bg1"/>
+                </a:solidFill>
+              </a:rPr>
+              <a:t>Nemzetközi értékesítés</a:t>
+            </a:r>
+          </a:p>
+          <a:p>
+            <a:pPr>
+              <a:lnSpc>
+                <a:spcPct val="150000"/>
+              </a:lnSpc>
+            </a:pPr>
+            <a:r>
+              <a:rPr lang="hu-HU" dirty="0">
+                <a:solidFill>
+                  <a:schemeClr val="bg1"/>
+                </a:solidFill>
+              </a:rPr>
+              <a:t>Saját fejlesztésű szerkezetek</a:t>
+            </a:r>
+          </a:p>
+          <a:p>
+            <a:pPr>
+              <a:lnSpc>
+                <a:spcPct val="150000"/>
+              </a:lnSpc>
+            </a:pPr>
+            <a:r>
+              <a:rPr lang="hu-HU" dirty="0">
+                <a:solidFill>
+                  <a:schemeClr val="bg1"/>
+                </a:solidFill>
+              </a:rPr>
+              <a:t>A márka küldetése: </a:t>
+            </a:r>
+            <a:r>
+              <a:rPr lang="hu-HU" i="1" dirty="0">
+                <a:solidFill>
+                  <a:schemeClr val="bg1"/>
+                </a:solidFill>
+              </a:rPr>
+              <a:t>“Időt adunk formába öntve.”</a:t>
+            </a:r>
+          </a:p>
+        </p:txBody>
+      </p:sp>
+    </p:spTree>
+    <p:extLst>
+      <p:ext uri="{BB962C8B-B14F-4D97-AF65-F5344CB8AC3E}">
+        <p14:creationId xmlns:p14="http://schemas.microsoft.com/office/powerpoint/2010/main" val="3640725299"/>
+      </p:ext>
+    </p:extLst>
+  </p:cSld>
+  <p:clrMapOvr>
+    <a:masterClrMapping/>
+  </p:clrMapOvr>
+</p:sld>
+</file>
+
+<file path=ppt/slides/slide20.xml><?xml version="1.0" encoding="utf-8"?>
+<p:sld xmlns:a="http://schemas.openxmlformats.org/drawingml/2006/main" xmlns:r="http://schemas.openxmlformats.org/officeDocument/2006/relationships" xmlns:p="http://schemas.openxmlformats.org/presentationml/2006/main">
+  <p:cSld>
+    <p:spTree>
+      <p:nvGrpSpPr>
+        <p:cNvPr id="1" name=""/>
+        <p:cNvGrpSpPr/>
+        <p:nvPr/>
+      </p:nvGrpSpPr>
+      <p:grpSpPr>
+        <a:xfrm>
+          <a:off x="0" y="0"/>
+          <a:ext cx="0" cy="0"/>
+          <a:chOff x="0" y="0"/>
+          <a:chExt cx="0" cy="0"/>
+        </a:xfrm>
+      </p:grpSpPr>
+      <p:sp>
+        <p:nvSpPr>
+          <p:cNvPr id="2" name="Cím 1">
+            <a:extLst>
+              <a:ext uri="{FF2B5EF4-FFF2-40B4-BE49-F238E27FC236}">
+                <a16:creationId xmlns:a16="http://schemas.microsoft.com/office/drawing/2014/main" id="{70CBFA45-3B6C-66EC-B471-4725A98AEDFF}"/>
+              </a:ext>
+            </a:extLst>
+          </p:cNvPr>
+          <p:cNvSpPr>
+            <a:spLocks noGrp="1"/>
+          </p:cNvSpPr>
+          <p:nvPr>
+            <p:ph type="title"/>
+          </p:nvPr>
+        </p:nvSpPr>
+        <p:spPr/>
+        <p:txBody>
+          <a:bodyPr/>
+          <a:lstStyle/>
+          <a:p>
+            <a:r>
+              <a:rPr lang="hu-HU" b="1" dirty="0">
+                <a:solidFill>
+                  <a:schemeClr val="bg1"/>
+                </a:solidFill>
+              </a:rPr>
+              <a:t>File </a:t>
+            </a:r>
+            <a:r>
+              <a:rPr lang="hu-HU" b="1" dirty="0" err="1">
+                <a:solidFill>
+                  <a:schemeClr val="bg1"/>
+                </a:solidFill>
+              </a:rPr>
+              <a:t>Share</a:t>
+            </a:r>
+            <a:r>
+              <a:rPr lang="hu-HU" b="1" dirty="0">
+                <a:solidFill>
+                  <a:schemeClr val="bg1"/>
+                </a:solidFill>
+              </a:rPr>
+              <a:t> </a:t>
+            </a:r>
+            <a:r>
+              <a:rPr lang="hu-HU" b="1" dirty="0" err="1">
+                <a:solidFill>
+                  <a:schemeClr val="bg1"/>
+                </a:solidFill>
+              </a:rPr>
+              <a:t>Witness</a:t>
+            </a:r>
+            <a:r>
+              <a:rPr lang="hu-HU" b="1" dirty="0">
+                <a:solidFill>
+                  <a:schemeClr val="bg1"/>
+                </a:solidFill>
+              </a:rPr>
+              <a:t> és </a:t>
+            </a:r>
+            <a:r>
+              <a:rPr lang="hu-HU" b="1" dirty="0" err="1">
+                <a:solidFill>
+                  <a:schemeClr val="bg1"/>
+                </a:solidFill>
+              </a:rPr>
+              <a:t>Quorum</a:t>
+            </a:r>
+            <a:endParaRPr lang="hu-HU" b="1" dirty="0">
+              <a:solidFill>
+                <a:schemeClr val="bg1"/>
+              </a:solidFill>
+            </a:endParaRPr>
+          </a:p>
+        </p:txBody>
+      </p:sp>
+      <p:sp>
+        <p:nvSpPr>
+          <p:cNvPr id="3" name="Tartalom helye 2">
+            <a:extLst>
+              <a:ext uri="{FF2B5EF4-FFF2-40B4-BE49-F238E27FC236}">
+                <a16:creationId xmlns:a16="http://schemas.microsoft.com/office/drawing/2014/main" id="{BA08E473-C893-3546-E3BC-6A0B564A99D1}"/>
+              </a:ext>
+            </a:extLst>
+          </p:cNvPr>
+          <p:cNvSpPr>
+            <a:spLocks noGrp="1"/>
+          </p:cNvSpPr>
+          <p:nvPr>
+            <p:ph sz="half" idx="1"/>
+          </p:nvPr>
+        </p:nvSpPr>
+        <p:spPr/>
+        <p:txBody>
+          <a:bodyPr/>
+          <a:lstStyle/>
+          <a:p>
+            <a:pPr>
+              <a:lnSpc>
+                <a:spcPct val="150000"/>
+              </a:lnSpc>
+            </a:pPr>
+            <a:r>
+              <a:rPr lang="hu-HU" dirty="0">
+                <a:solidFill>
+                  <a:schemeClr val="bg1"/>
+                </a:solidFill>
+              </a:rPr>
+              <a:t>Split-</a:t>
+            </a:r>
+            <a:r>
+              <a:rPr lang="hu-HU" dirty="0" err="1">
+                <a:solidFill>
+                  <a:schemeClr val="bg1"/>
+                </a:solidFill>
+              </a:rPr>
+              <a:t>brain</a:t>
+            </a:r>
+            <a:r>
+              <a:rPr lang="hu-HU" dirty="0">
+                <a:solidFill>
+                  <a:schemeClr val="bg1"/>
+                </a:solidFill>
+              </a:rPr>
+              <a:t> állapot elkerülése</a:t>
+            </a:r>
+          </a:p>
+          <a:p>
+            <a:pPr>
+              <a:lnSpc>
+                <a:spcPct val="150000"/>
+              </a:lnSpc>
+            </a:pPr>
+            <a:r>
+              <a:rPr lang="hu-HU" dirty="0">
+                <a:solidFill>
+                  <a:schemeClr val="bg1"/>
+                </a:solidFill>
+              </a:rPr>
+              <a:t>Egyértelmű döntés aktív </a:t>
+            </a:r>
+            <a:r>
+              <a:rPr lang="hu-HU" dirty="0" err="1">
+                <a:solidFill>
+                  <a:schemeClr val="bg1"/>
+                </a:solidFill>
+              </a:rPr>
+              <a:t>node-ról</a:t>
+            </a:r>
+            <a:endParaRPr lang="hu-HU" dirty="0">
+              <a:solidFill>
+                <a:schemeClr val="bg1"/>
+              </a:solidFill>
+            </a:endParaRPr>
+          </a:p>
+          <a:p>
+            <a:pPr>
+              <a:lnSpc>
+                <a:spcPct val="150000"/>
+              </a:lnSpc>
+            </a:pPr>
+            <a:r>
+              <a:rPr lang="hu-HU" dirty="0">
+                <a:solidFill>
+                  <a:schemeClr val="bg1"/>
+                </a:solidFill>
+              </a:rPr>
+              <a:t>Többségi szavazás elve</a:t>
+            </a:r>
+          </a:p>
+          <a:p>
+            <a:pPr>
+              <a:lnSpc>
+                <a:spcPct val="150000"/>
+              </a:lnSpc>
+            </a:pPr>
+            <a:r>
+              <a:rPr lang="hu-HU" dirty="0">
+                <a:solidFill>
+                  <a:schemeClr val="bg1"/>
+                </a:solidFill>
+              </a:rPr>
+              <a:t>FSW külön szerver, nem tárol adatbázis másolatot</a:t>
+            </a:r>
+          </a:p>
+        </p:txBody>
+      </p:sp>
+      <p:pic>
+        <p:nvPicPr>
+          <p:cNvPr id="12" name="Tartalom helye 11" descr="A képen szöveg, elektronika, képernyőkép, képernyő látható&#10;&#10;Előfordulhat, hogy az AI által létrehozott tartalom helytelen.">
+            <a:extLst>
+              <a:ext uri="{FF2B5EF4-FFF2-40B4-BE49-F238E27FC236}">
+                <a16:creationId xmlns:a16="http://schemas.microsoft.com/office/drawing/2014/main" id="{92870FFD-29DE-F759-80EF-87DC8120D514}"/>
+              </a:ext>
+            </a:extLst>
+          </p:cNvPr>
+          <p:cNvPicPr>
+            <a:picLocks noGrp="1" noChangeAspect="1"/>
+          </p:cNvPicPr>
+          <p:nvPr>
+            <p:ph sz="half" idx="2"/>
+          </p:nvPr>
+        </p:nvPicPr>
+        <p:blipFill>
+          <a:blip r:embed="rId2">
+            <a:extLst>
+              <a:ext uri="{28A0092B-C50C-407E-A947-70E740481C1C}">
+                <a14:useLocalDpi xmlns:a14="http://schemas.microsoft.com/office/drawing/2010/main" val="0"/>
+              </a:ext>
+            </a:extLst>
+          </a:blip>
+          <a:stretch>
+            <a:fillRect/>
+          </a:stretch>
+        </p:blipFill>
+        <p:spPr>
+          <a:xfrm>
+            <a:off x="6172200" y="2265191"/>
+            <a:ext cx="5181600" cy="3472205"/>
+          </a:xfrm>
+          <a:prstGeom prst="rect">
+            <a:avLst/>
+          </a:prstGeom>
+        </p:spPr>
+      </p:pic>
+    </p:spTree>
+    <p:extLst>
+      <p:ext uri="{BB962C8B-B14F-4D97-AF65-F5344CB8AC3E}">
+        <p14:creationId xmlns:p14="http://schemas.microsoft.com/office/powerpoint/2010/main" val="3513773795"/>
+      </p:ext>
+    </p:extLst>
+  </p:cSld>
+  <p:clrMapOvr>
+    <a:masterClrMapping/>
+  </p:clrMapOvr>
+</p:sld>
+</file>
+
+<file path=ppt/slides/slide21.xml><?xml version="1.0" encoding="utf-8"?>
+<p:sld xmlns:a="http://schemas.openxmlformats.org/drawingml/2006/main" xmlns:r="http://schemas.openxmlformats.org/officeDocument/2006/relationships" xmlns:p="http://schemas.openxmlformats.org/presentationml/2006/main">
+  <p:cSld>
+    <p:spTree>
+      <p:nvGrpSpPr>
+        <p:cNvPr id="1" name=""/>
+        <p:cNvGrpSpPr/>
+        <p:nvPr/>
+      </p:nvGrpSpPr>
+      <p:grpSpPr>
+        <a:xfrm>
+          <a:off x="0" y="0"/>
+          <a:ext cx="0" cy="0"/>
+          <a:chOff x="0" y="0"/>
+          <a:chExt cx="0" cy="0"/>
+        </a:xfrm>
+      </p:grpSpPr>
+      <p:sp>
+        <p:nvSpPr>
+          <p:cNvPr id="2" name="Cím 1">
+            <a:extLst>
+              <a:ext uri="{FF2B5EF4-FFF2-40B4-BE49-F238E27FC236}">
+                <a16:creationId xmlns:a16="http://schemas.microsoft.com/office/drawing/2014/main" id="{547ACA53-9D9B-AB59-BDB6-F29A7ED9051A}"/>
+              </a:ext>
+            </a:extLst>
+          </p:cNvPr>
+          <p:cNvSpPr>
+            <a:spLocks noGrp="1"/>
+          </p:cNvSpPr>
+          <p:nvPr>
+            <p:ph type="title"/>
+          </p:nvPr>
+        </p:nvSpPr>
+        <p:spPr/>
+        <p:txBody>
+          <a:bodyPr/>
+          <a:lstStyle/>
+          <a:p>
+            <a:r>
+              <a:rPr lang="en-US" b="1" dirty="0">
+                <a:solidFill>
+                  <a:schemeClr val="bg1"/>
+                </a:solidFill>
+              </a:rPr>
+              <a:t>Group Managed Service Account (</a:t>
+            </a:r>
+            <a:r>
+              <a:rPr lang="en-US" b="1" dirty="0" err="1">
+                <a:solidFill>
+                  <a:schemeClr val="bg1"/>
+                </a:solidFill>
+              </a:rPr>
+              <a:t>gMSA</a:t>
+            </a:r>
+            <a:r>
+              <a:rPr lang="en-US" b="1" dirty="0">
+                <a:solidFill>
+                  <a:schemeClr val="bg1"/>
+                </a:solidFill>
+              </a:rPr>
+              <a:t>)</a:t>
+            </a:r>
+            <a:endParaRPr lang="hu-HU" b="1" dirty="0">
+              <a:solidFill>
+                <a:schemeClr val="bg1"/>
+              </a:solidFill>
+            </a:endParaRPr>
+          </a:p>
+        </p:txBody>
+      </p:sp>
+      <p:sp>
+        <p:nvSpPr>
+          <p:cNvPr id="3" name="Tartalom helye 2">
+            <a:extLst>
+              <a:ext uri="{FF2B5EF4-FFF2-40B4-BE49-F238E27FC236}">
+                <a16:creationId xmlns:a16="http://schemas.microsoft.com/office/drawing/2014/main" id="{DC7963CC-8365-33C3-EA0F-D8D418577E8C}"/>
+              </a:ext>
+            </a:extLst>
+          </p:cNvPr>
+          <p:cNvSpPr>
+            <a:spLocks noGrp="1"/>
+          </p:cNvSpPr>
+          <p:nvPr>
+            <p:ph sz="half" idx="1"/>
+          </p:nvPr>
+        </p:nvSpPr>
+        <p:spPr>
+          <a:xfrm>
+            <a:off x="838200" y="1825625"/>
+            <a:ext cx="5937504" cy="4351338"/>
+          </a:xfrm>
+        </p:spPr>
+        <p:txBody>
+          <a:bodyPr/>
+          <a:lstStyle/>
+          <a:p>
+            <a:pPr>
+              <a:lnSpc>
+                <a:spcPct val="100000"/>
+              </a:lnSpc>
+            </a:pPr>
+            <a:r>
+              <a:rPr lang="hu-HU" dirty="0">
+                <a:solidFill>
+                  <a:schemeClr val="bg1"/>
+                </a:solidFill>
+              </a:rPr>
+              <a:t>2 </a:t>
+            </a:r>
+            <a:r>
+              <a:rPr lang="hu-HU" dirty="0" err="1">
+                <a:solidFill>
+                  <a:schemeClr val="bg1"/>
+                </a:solidFill>
+              </a:rPr>
+              <a:t>gMSA</a:t>
+            </a:r>
+            <a:r>
+              <a:rPr lang="hu-HU" dirty="0">
+                <a:solidFill>
+                  <a:schemeClr val="bg1"/>
+                </a:solidFill>
+              </a:rPr>
+              <a:t> használata:</a:t>
+            </a:r>
+          </a:p>
+          <a:p>
+            <a:pPr lvl="1">
+              <a:lnSpc>
+                <a:spcPct val="100000"/>
+              </a:lnSpc>
+            </a:pPr>
+            <a:r>
+              <a:rPr lang="hu-HU" dirty="0">
+                <a:solidFill>
+                  <a:schemeClr val="bg1"/>
+                </a:solidFill>
+              </a:rPr>
+              <a:t>SQL </a:t>
+            </a:r>
+            <a:r>
+              <a:rPr lang="hu-HU" dirty="0" err="1">
+                <a:solidFill>
+                  <a:schemeClr val="bg1"/>
+                </a:solidFill>
+              </a:rPr>
+              <a:t>Engine</a:t>
+            </a:r>
+            <a:endParaRPr lang="hu-HU" dirty="0">
+              <a:solidFill>
+                <a:schemeClr val="bg1"/>
+              </a:solidFill>
+            </a:endParaRPr>
+          </a:p>
+          <a:p>
+            <a:pPr lvl="1">
+              <a:lnSpc>
+                <a:spcPct val="100000"/>
+              </a:lnSpc>
+            </a:pPr>
+            <a:r>
+              <a:rPr lang="hu-HU" dirty="0">
+                <a:solidFill>
+                  <a:schemeClr val="bg1"/>
+                </a:solidFill>
+              </a:rPr>
+              <a:t>SQL </a:t>
+            </a:r>
+            <a:r>
+              <a:rPr lang="hu-HU" dirty="0" err="1">
+                <a:solidFill>
+                  <a:schemeClr val="bg1"/>
+                </a:solidFill>
+              </a:rPr>
+              <a:t>Agent</a:t>
+            </a:r>
+            <a:endParaRPr lang="hu-HU" dirty="0">
+              <a:solidFill>
+                <a:schemeClr val="bg1"/>
+              </a:solidFill>
+            </a:endParaRPr>
+          </a:p>
+          <a:p>
+            <a:pPr>
+              <a:lnSpc>
+                <a:spcPct val="100000"/>
+              </a:lnSpc>
+            </a:pPr>
+            <a:r>
+              <a:rPr lang="hu-HU" dirty="0">
+                <a:solidFill>
+                  <a:schemeClr val="bg1"/>
+                </a:solidFill>
+              </a:rPr>
+              <a:t>Automatikus jelszókezelés</a:t>
+            </a:r>
+          </a:p>
+          <a:p>
+            <a:pPr>
+              <a:lnSpc>
+                <a:spcPct val="100000"/>
+              </a:lnSpc>
+            </a:pPr>
+            <a:r>
+              <a:rPr lang="hu-HU" dirty="0">
+                <a:solidFill>
+                  <a:schemeClr val="bg1"/>
+                </a:solidFill>
+              </a:rPr>
+              <a:t>AD által menedzselt</a:t>
+            </a:r>
+          </a:p>
+          <a:p>
+            <a:pPr>
+              <a:lnSpc>
+                <a:spcPct val="100000"/>
+              </a:lnSpc>
+            </a:pPr>
+            <a:r>
+              <a:rPr lang="hu-HU" dirty="0">
+                <a:solidFill>
+                  <a:schemeClr val="bg1"/>
+                </a:solidFill>
+              </a:rPr>
+              <a:t>Nincs manuális jelszórotáció</a:t>
+            </a:r>
+          </a:p>
+          <a:p>
+            <a:pPr>
+              <a:lnSpc>
+                <a:spcPct val="100000"/>
+              </a:lnSpc>
+            </a:pPr>
+            <a:r>
+              <a:rPr lang="hu-HU" dirty="0">
+                <a:solidFill>
+                  <a:schemeClr val="bg1"/>
+                </a:solidFill>
+              </a:rPr>
+              <a:t>Több </a:t>
+            </a:r>
+            <a:r>
+              <a:rPr lang="hu-HU" dirty="0" err="1">
+                <a:solidFill>
+                  <a:schemeClr val="bg1"/>
+                </a:solidFill>
+              </a:rPr>
+              <a:t>node</a:t>
+            </a:r>
+            <a:r>
+              <a:rPr lang="hu-HU" dirty="0">
+                <a:solidFill>
+                  <a:schemeClr val="bg1"/>
+                </a:solidFill>
+              </a:rPr>
+              <a:t> által használható (</a:t>
+            </a:r>
+            <a:r>
+              <a:rPr lang="hu-HU" dirty="0" err="1">
+                <a:solidFill>
+                  <a:schemeClr val="bg1"/>
+                </a:solidFill>
+              </a:rPr>
+              <a:t>cluster</a:t>
+            </a:r>
+            <a:r>
+              <a:rPr lang="hu-HU" dirty="0">
+                <a:solidFill>
+                  <a:schemeClr val="bg1"/>
+                </a:solidFill>
+              </a:rPr>
+              <a:t> kompatibilis)</a:t>
+            </a:r>
+          </a:p>
+        </p:txBody>
+      </p:sp>
+      <p:pic>
+        <p:nvPicPr>
+          <p:cNvPr id="7" name="Tartalom helye 6" descr="A képen szöveg, képernyőkép, szoftver, Számítógépes ikon látható&#10;&#10;Előfordulhat, hogy az AI által létrehozott tartalom helytelen.">
+            <a:extLst>
+              <a:ext uri="{FF2B5EF4-FFF2-40B4-BE49-F238E27FC236}">
+                <a16:creationId xmlns:a16="http://schemas.microsoft.com/office/drawing/2014/main" id="{99AF7026-FBBD-95D9-D4DA-1C800EF2ED0D}"/>
+              </a:ext>
+            </a:extLst>
+          </p:cNvPr>
+          <p:cNvPicPr>
+            <a:picLocks noGrp="1" noChangeAspect="1"/>
+          </p:cNvPicPr>
+          <p:nvPr>
+            <p:ph sz="half" idx="2"/>
+          </p:nvPr>
+        </p:nvPicPr>
+        <p:blipFill>
+          <a:blip r:embed="rId2">
+            <a:extLst>
+              <a:ext uri="{28A0092B-C50C-407E-A947-70E740481C1C}">
+                <a14:useLocalDpi xmlns:a14="http://schemas.microsoft.com/office/drawing/2010/main" val="0"/>
+              </a:ext>
+            </a:extLst>
+          </a:blip>
+          <a:srcRect r="31706"/>
+          <a:stretch>
+            <a:fillRect/>
+          </a:stretch>
+        </p:blipFill>
+        <p:spPr>
+          <a:xfrm>
+            <a:off x="6096000" y="2079466"/>
+            <a:ext cx="5522039" cy="3843655"/>
+          </a:xfrm>
+          <a:prstGeom prst="rect">
+            <a:avLst/>
+          </a:prstGeom>
+        </p:spPr>
+      </p:pic>
+    </p:spTree>
+    <p:extLst>
+      <p:ext uri="{BB962C8B-B14F-4D97-AF65-F5344CB8AC3E}">
+        <p14:creationId xmlns:p14="http://schemas.microsoft.com/office/powerpoint/2010/main" val="3976502615"/>
+      </p:ext>
+    </p:extLst>
+  </p:cSld>
+  <p:clrMapOvr>
+    <a:masterClrMapping/>
+  </p:clrMapOvr>
+</p:sld>
+</file>
+
+<file path=ppt/slides/slide22.xml><?xml version="1.0" encoding="utf-8"?>
+<p:sld xmlns:a="http://schemas.openxmlformats.org/drawingml/2006/main" xmlns:r="http://schemas.openxmlformats.org/officeDocument/2006/relationships" xmlns:p="http://schemas.openxmlformats.org/presentationml/2006/main">
+  <p:cSld>
+    <p:spTree>
+      <p:nvGrpSpPr>
+        <p:cNvPr id="1" name=""/>
+        <p:cNvGrpSpPr/>
+        <p:nvPr/>
+      </p:nvGrpSpPr>
+      <p:grpSpPr>
+        <a:xfrm>
+          <a:off x="0" y="0"/>
+          <a:ext cx="0" cy="0"/>
+          <a:chOff x="0" y="0"/>
+          <a:chExt cx="0" cy="0"/>
+        </a:xfrm>
+      </p:grpSpPr>
+      <p:sp>
+        <p:nvSpPr>
+          <p:cNvPr id="2" name="Cím 1">
+            <a:extLst>
+              <a:ext uri="{FF2B5EF4-FFF2-40B4-BE49-F238E27FC236}">
+                <a16:creationId xmlns:a16="http://schemas.microsoft.com/office/drawing/2014/main" id="{49ED61E1-9555-7373-FABD-08CC97CA9679}"/>
+              </a:ext>
+            </a:extLst>
+          </p:cNvPr>
+          <p:cNvSpPr>
+            <a:spLocks noGrp="1"/>
+          </p:cNvSpPr>
+          <p:nvPr>
+            <p:ph type="title"/>
+          </p:nvPr>
+        </p:nvSpPr>
+        <p:spPr/>
+        <p:txBody>
+          <a:bodyPr/>
+          <a:lstStyle/>
+          <a:p>
+            <a:r>
+              <a:rPr lang="hu-HU" b="1" dirty="0">
+                <a:solidFill>
+                  <a:schemeClr val="bg1"/>
+                </a:solidFill>
+              </a:rPr>
+              <a:t>Eredmények</a:t>
+            </a:r>
+          </a:p>
+        </p:txBody>
+      </p:sp>
+      <p:sp>
+        <p:nvSpPr>
+          <p:cNvPr id="3" name="Tartalom helye 2">
+            <a:extLst>
+              <a:ext uri="{FF2B5EF4-FFF2-40B4-BE49-F238E27FC236}">
+                <a16:creationId xmlns:a16="http://schemas.microsoft.com/office/drawing/2014/main" id="{92E69E1D-146F-E82C-30D1-A2FFEBBFB25F}"/>
+              </a:ext>
+            </a:extLst>
+          </p:cNvPr>
+          <p:cNvSpPr>
+            <a:spLocks noGrp="1"/>
+          </p:cNvSpPr>
+          <p:nvPr>
+            <p:ph idx="1"/>
+          </p:nvPr>
+        </p:nvSpPr>
+        <p:spPr/>
+        <p:txBody>
+          <a:bodyPr/>
+          <a:lstStyle/>
+          <a:p>
+            <a:pPr>
+              <a:lnSpc>
+                <a:spcPct val="150000"/>
+              </a:lnSpc>
+            </a:pPr>
+            <a:r>
+              <a:rPr lang="hu-HU" dirty="0">
+                <a:solidFill>
+                  <a:schemeClr val="bg1"/>
+                </a:solidFill>
+              </a:rPr>
+              <a:t>Központi menedzsment</a:t>
+            </a:r>
+          </a:p>
+          <a:p>
+            <a:pPr>
+              <a:lnSpc>
+                <a:spcPct val="150000"/>
+              </a:lnSpc>
+            </a:pPr>
+            <a:r>
+              <a:rPr lang="hu-HU" dirty="0">
+                <a:solidFill>
+                  <a:schemeClr val="bg1"/>
+                </a:solidFill>
+              </a:rPr>
+              <a:t>Magas rendelkezésre állás</a:t>
+            </a:r>
+          </a:p>
+          <a:p>
+            <a:pPr>
+              <a:lnSpc>
+                <a:spcPct val="150000"/>
+              </a:lnSpc>
+            </a:pPr>
+            <a:r>
+              <a:rPr lang="hu-HU" dirty="0">
+                <a:solidFill>
+                  <a:schemeClr val="bg1"/>
+                </a:solidFill>
+              </a:rPr>
+              <a:t>Skálázható infrastruktúra</a:t>
+            </a:r>
+          </a:p>
+          <a:p>
+            <a:pPr>
+              <a:lnSpc>
+                <a:spcPct val="150000"/>
+              </a:lnSpc>
+            </a:pPr>
+            <a:r>
+              <a:rPr lang="hu-HU" dirty="0">
+                <a:solidFill>
+                  <a:schemeClr val="bg1"/>
+                </a:solidFill>
+              </a:rPr>
+              <a:t>Biztonságos jogosultságkezelés</a:t>
+            </a:r>
+          </a:p>
+        </p:txBody>
+      </p:sp>
+    </p:spTree>
+    <p:extLst>
+      <p:ext uri="{BB962C8B-B14F-4D97-AF65-F5344CB8AC3E}">
+        <p14:creationId xmlns:p14="http://schemas.microsoft.com/office/powerpoint/2010/main" val="3582283533"/>
+      </p:ext>
+    </p:extLst>
+  </p:cSld>
+  <p:clrMapOvr>
+    <a:masterClrMapping/>
+  </p:clrMapOvr>
+</p:sld>
+</file>
+
+<file path=ppt/slides/slide23.xml><?xml version="1.0" encoding="utf-8"?>
+<p:sld xmlns:a="http://schemas.openxmlformats.org/drawingml/2006/main" xmlns:r="http://schemas.openxmlformats.org/officeDocument/2006/relationships" xmlns:p="http://schemas.openxmlformats.org/presentationml/2006/main">
+  <p:cSld>
+    <p:spTree>
+      <p:nvGrpSpPr>
+        <p:cNvPr id="1" name=""/>
+        <p:cNvGrpSpPr/>
+        <p:nvPr/>
+      </p:nvGrpSpPr>
+      <p:grpSpPr>
+        <a:xfrm>
+          <a:off x="0" y="0"/>
+          <a:ext cx="0" cy="0"/>
+          <a:chOff x="0" y="0"/>
+          <a:chExt cx="0" cy="0"/>
+        </a:xfrm>
+      </p:grpSpPr>
+      <p:sp>
+        <p:nvSpPr>
+          <p:cNvPr id="2" name="Cím 1">
+            <a:extLst>
+              <a:ext uri="{FF2B5EF4-FFF2-40B4-BE49-F238E27FC236}">
+                <a16:creationId xmlns:a16="http://schemas.microsoft.com/office/drawing/2014/main" id="{30DFE52B-F7B0-46FA-A218-3FC774DC6028}"/>
+              </a:ext>
+            </a:extLst>
+          </p:cNvPr>
+          <p:cNvSpPr>
+            <a:spLocks noGrp="1"/>
+          </p:cNvSpPr>
+          <p:nvPr>
+            <p:ph type="title"/>
+          </p:nvPr>
+        </p:nvSpPr>
+        <p:spPr/>
+        <p:txBody>
+          <a:bodyPr/>
+          <a:lstStyle/>
+          <a:p>
+            <a:r>
+              <a:rPr lang="hu-HU" b="1" dirty="0">
+                <a:solidFill>
+                  <a:schemeClr val="bg1"/>
+                </a:solidFill>
+              </a:rPr>
+              <a:t>Továbbfejlesztési lehetőségek</a:t>
+            </a:r>
+          </a:p>
+        </p:txBody>
+      </p:sp>
+      <p:sp>
+        <p:nvSpPr>
+          <p:cNvPr id="3" name="Tartalom helye 2">
+            <a:extLst>
+              <a:ext uri="{FF2B5EF4-FFF2-40B4-BE49-F238E27FC236}">
+                <a16:creationId xmlns:a16="http://schemas.microsoft.com/office/drawing/2014/main" id="{0106E9DF-D7B0-41C6-2FDF-EC88C93C605A}"/>
+              </a:ext>
+            </a:extLst>
+          </p:cNvPr>
+          <p:cNvSpPr>
+            <a:spLocks noGrp="1"/>
+          </p:cNvSpPr>
+          <p:nvPr>
+            <p:ph idx="1"/>
+          </p:nvPr>
+        </p:nvSpPr>
+        <p:spPr/>
+        <p:txBody>
+          <a:bodyPr/>
+          <a:lstStyle/>
+          <a:p>
+            <a:pPr>
+              <a:lnSpc>
+                <a:spcPct val="150000"/>
+              </a:lnSpc>
+            </a:pPr>
+            <a:r>
+              <a:rPr lang="hu-HU" dirty="0">
+                <a:solidFill>
+                  <a:schemeClr val="bg1"/>
+                </a:solidFill>
+              </a:rPr>
+              <a:t>MFA a management részére</a:t>
+            </a:r>
+          </a:p>
+          <a:p>
+            <a:pPr>
+              <a:lnSpc>
+                <a:spcPct val="150000"/>
+              </a:lnSpc>
+            </a:pPr>
+            <a:r>
+              <a:rPr lang="hu-HU" dirty="0" err="1">
+                <a:solidFill>
+                  <a:schemeClr val="bg1"/>
+                </a:solidFill>
+              </a:rPr>
+              <a:t>Azure</a:t>
+            </a:r>
+            <a:r>
+              <a:rPr lang="hu-HU" dirty="0">
+                <a:solidFill>
+                  <a:schemeClr val="bg1"/>
+                </a:solidFill>
+              </a:rPr>
+              <a:t> Site </a:t>
+            </a:r>
+            <a:r>
+              <a:rPr lang="hu-HU" dirty="0" err="1">
+                <a:solidFill>
+                  <a:schemeClr val="bg1"/>
+                </a:solidFill>
+              </a:rPr>
+              <a:t>Recovery</a:t>
+            </a:r>
+            <a:endParaRPr lang="hu-HU" dirty="0">
+              <a:solidFill>
+                <a:schemeClr val="bg1"/>
+              </a:solidFill>
+            </a:endParaRPr>
+          </a:p>
+          <a:p>
+            <a:pPr>
+              <a:lnSpc>
+                <a:spcPct val="150000"/>
+              </a:lnSpc>
+            </a:pPr>
+            <a:r>
+              <a:rPr lang="hu-HU" dirty="0">
+                <a:solidFill>
+                  <a:schemeClr val="bg1"/>
+                </a:solidFill>
+              </a:rPr>
+              <a:t>SIEM bevezetése</a:t>
+            </a:r>
+          </a:p>
+          <a:p>
+            <a:pPr>
+              <a:lnSpc>
+                <a:spcPct val="150000"/>
+              </a:lnSpc>
+            </a:pPr>
+            <a:r>
+              <a:rPr lang="hu-HU" dirty="0">
+                <a:solidFill>
+                  <a:schemeClr val="bg1"/>
+                </a:solidFill>
+              </a:rPr>
+              <a:t>Patch management finomítása (WSUS)</a:t>
+            </a:r>
+          </a:p>
+          <a:p>
+            <a:pPr>
+              <a:lnSpc>
+                <a:spcPct val="150000"/>
+              </a:lnSpc>
+            </a:pPr>
+            <a:r>
+              <a:rPr lang="hu-HU" dirty="0" err="1">
+                <a:solidFill>
+                  <a:schemeClr val="bg1"/>
+                </a:solidFill>
+              </a:rPr>
+              <a:t>Zero</a:t>
+            </a:r>
+            <a:r>
+              <a:rPr lang="hu-HU" dirty="0">
+                <a:solidFill>
+                  <a:schemeClr val="bg1"/>
+                </a:solidFill>
+              </a:rPr>
+              <a:t> </a:t>
+            </a:r>
+            <a:r>
+              <a:rPr lang="hu-HU" dirty="0" err="1">
+                <a:solidFill>
+                  <a:schemeClr val="bg1"/>
+                </a:solidFill>
+              </a:rPr>
+              <a:t>Trust</a:t>
+            </a:r>
+            <a:r>
+              <a:rPr lang="hu-HU" dirty="0">
+                <a:solidFill>
+                  <a:schemeClr val="bg1"/>
+                </a:solidFill>
+              </a:rPr>
+              <a:t> modell alkalmazása</a:t>
+            </a:r>
+          </a:p>
+        </p:txBody>
+      </p:sp>
+    </p:spTree>
+    <p:extLst>
+      <p:ext uri="{BB962C8B-B14F-4D97-AF65-F5344CB8AC3E}">
+        <p14:creationId xmlns:p14="http://schemas.microsoft.com/office/powerpoint/2010/main" val="2882106778"/>
+      </p:ext>
+    </p:extLst>
+  </p:cSld>
+  <p:clrMapOvr>
+    <a:masterClrMapping/>
+  </p:clrMapOvr>
+</p:sld>
+</file>
+
+<file path=ppt/slides/slide24.xml><?xml version="1.0" encoding="utf-8"?>
+<p:sld xmlns:a="http://schemas.openxmlformats.org/drawingml/2006/main" xmlns:r="http://schemas.openxmlformats.org/officeDocument/2006/relationships" xmlns:p="http://schemas.openxmlformats.org/presentationml/2006/main">
+  <p:cSld>
+    <p:spTree>
+      <p:nvGrpSpPr>
+        <p:cNvPr id="1" name=""/>
+        <p:cNvGrpSpPr/>
+        <p:nvPr/>
+      </p:nvGrpSpPr>
+      <p:grpSpPr>
+        <a:xfrm>
+          <a:off x="0" y="0"/>
+          <a:ext cx="0" cy="0"/>
+          <a:chOff x="0" y="0"/>
+          <a:chExt cx="0" cy="0"/>
+        </a:xfrm>
+      </p:grpSpPr>
+      <p:sp>
+        <p:nvSpPr>
+          <p:cNvPr id="2" name="Cím 1">
+            <a:extLst>
+              <a:ext uri="{FF2B5EF4-FFF2-40B4-BE49-F238E27FC236}">
+                <a16:creationId xmlns:a16="http://schemas.microsoft.com/office/drawing/2014/main" id="{93EB9F68-051A-1F51-0278-2B23CAEEC14C}"/>
+              </a:ext>
+            </a:extLst>
+          </p:cNvPr>
+          <p:cNvSpPr>
+            <a:spLocks noGrp="1"/>
+          </p:cNvSpPr>
+          <p:nvPr>
+            <p:ph type="title"/>
+          </p:nvPr>
+        </p:nvSpPr>
+        <p:spPr>
+          <a:xfrm>
+            <a:off x="838200" y="2766218"/>
+            <a:ext cx="10515600" cy="1325563"/>
+          </a:xfrm>
+        </p:spPr>
+        <p:txBody>
+          <a:bodyPr/>
+          <a:lstStyle/>
+          <a:p>
+            <a:pPr algn="ctr"/>
+            <a:r>
+              <a:rPr lang="hu-HU" b="1" dirty="0">
+                <a:solidFill>
+                  <a:schemeClr val="bg1"/>
+                </a:solidFill>
+              </a:rPr>
+              <a:t>Köszönöm a figyelmet!</a:t>
+            </a:r>
+          </a:p>
+        </p:txBody>
+      </p:sp>
+    </p:spTree>
+    <p:extLst>
+      <p:ext uri="{BB962C8B-B14F-4D97-AF65-F5344CB8AC3E}">
+        <p14:creationId xmlns:p14="http://schemas.microsoft.com/office/powerpoint/2010/main" val="1919562781"/>
+      </p:ext>
+    </p:extLst>
+  </p:cSld>
+  <p:clrMapOvr>
+    <a:masterClrMapping/>
+  </p:clrMapOvr>
+</p:sld>
+</file>
+
+<file path=ppt/slides/slide3.xml><?xml version="1.0" encoding="utf-8"?>
+<p:sld xmlns:a="http://schemas.openxmlformats.org/drawingml/2006/main" xmlns:r="http://schemas.openxmlformats.org/officeDocument/2006/relationships" xmlns:p="http://schemas.openxmlformats.org/presentationml/2006/main">
+  <p:cSld>
+    <p:spTree>
+      <p:nvGrpSpPr>
+        <p:cNvPr id="1" name=""/>
+        <p:cNvGrpSpPr/>
+        <p:nvPr/>
+      </p:nvGrpSpPr>
+      <p:grpSpPr>
+        <a:xfrm>
+          <a:off x="0" y="0"/>
+          <a:ext cx="0" cy="0"/>
+          <a:chOff x="0" y="0"/>
+          <a:chExt cx="0" cy="0"/>
+        </a:xfrm>
+      </p:grpSpPr>
+      <p:sp>
+        <p:nvSpPr>
+          <p:cNvPr id="2" name="Cím 1">
+            <a:extLst>
+              <a:ext uri="{FF2B5EF4-FFF2-40B4-BE49-F238E27FC236}">
+                <a16:creationId xmlns:a16="http://schemas.microsoft.com/office/drawing/2014/main" id="{ABE66D63-5C8D-6811-7A91-74F4193404CD}"/>
+              </a:ext>
+            </a:extLst>
+          </p:cNvPr>
+          <p:cNvSpPr>
+            <a:spLocks noGrp="1"/>
+          </p:cNvSpPr>
+          <p:nvPr>
+            <p:ph type="title"/>
+          </p:nvPr>
+        </p:nvSpPr>
+        <p:spPr/>
+        <p:txBody>
+          <a:bodyPr/>
+          <a:lstStyle/>
+          <a:p>
+            <a:r>
+              <a:rPr lang="hu-HU" b="1" dirty="0">
+                <a:solidFill>
+                  <a:schemeClr val="bg1"/>
+                </a:solidFill>
+              </a:rPr>
+              <a:t>Telephelyeink</a:t>
+            </a:r>
+          </a:p>
+        </p:txBody>
+      </p:sp>
+      <p:sp>
+        <p:nvSpPr>
+          <p:cNvPr id="3" name="Tartalom helye 2">
+            <a:extLst>
+              <a:ext uri="{FF2B5EF4-FFF2-40B4-BE49-F238E27FC236}">
+                <a16:creationId xmlns:a16="http://schemas.microsoft.com/office/drawing/2014/main" id="{15FB7D74-2666-4EED-CA64-58586FAC1448}"/>
+              </a:ext>
+            </a:extLst>
+          </p:cNvPr>
+          <p:cNvSpPr>
+            <a:spLocks noGrp="1"/>
+          </p:cNvSpPr>
+          <p:nvPr>
+            <p:ph sz="half" idx="1"/>
+          </p:nvPr>
+        </p:nvSpPr>
+        <p:spPr>
+          <a:xfrm>
+            <a:off x="838200" y="1825625"/>
+            <a:ext cx="6175248" cy="4351338"/>
+          </a:xfrm>
+        </p:spPr>
+        <p:txBody>
+          <a:bodyPr/>
+          <a:lstStyle/>
+          <a:p>
+            <a:pPr>
+              <a:lnSpc>
+                <a:spcPct val="150000"/>
+              </a:lnSpc>
+            </a:pPr>
+            <a:r>
+              <a:rPr lang="hu-HU" dirty="0">
+                <a:solidFill>
+                  <a:schemeClr val="bg1"/>
+                </a:solidFill>
+              </a:rPr>
+              <a:t>Iroda – Vác</a:t>
+            </a:r>
+          </a:p>
+          <a:p>
+            <a:pPr>
+              <a:lnSpc>
+                <a:spcPct val="150000"/>
+              </a:lnSpc>
+            </a:pPr>
+            <a:r>
+              <a:rPr lang="hu-HU" dirty="0">
+                <a:solidFill>
+                  <a:schemeClr val="bg1"/>
+                </a:solidFill>
+              </a:rPr>
+              <a:t>Gyárüzem és raktár – Göd Ipartelep</a:t>
+            </a:r>
+          </a:p>
+          <a:p>
+            <a:pPr>
+              <a:lnSpc>
+                <a:spcPct val="150000"/>
+              </a:lnSpc>
+            </a:pPr>
+            <a:r>
+              <a:rPr lang="hu-HU" dirty="0">
+                <a:solidFill>
+                  <a:schemeClr val="bg1"/>
+                </a:solidFill>
+              </a:rPr>
+              <a:t>Szaküzlet – Budapest Deák Ferenc tér</a:t>
+            </a:r>
+          </a:p>
+          <a:p>
+            <a:pPr>
+              <a:lnSpc>
+                <a:spcPct val="150000"/>
+              </a:lnSpc>
+            </a:pPr>
+            <a:r>
+              <a:rPr lang="hu-HU" dirty="0">
+                <a:solidFill>
+                  <a:schemeClr val="bg1"/>
+                </a:solidFill>
+              </a:rPr>
+              <a:t>Adatközpont – </a:t>
+            </a:r>
+            <a:r>
+              <a:rPr lang="hu-HU" dirty="0" err="1">
+                <a:solidFill>
+                  <a:schemeClr val="bg1"/>
+                </a:solidFill>
+              </a:rPr>
+              <a:t>OceanData</a:t>
+            </a:r>
+            <a:r>
+              <a:rPr lang="hu-HU" dirty="0">
+                <a:solidFill>
+                  <a:schemeClr val="bg1"/>
+                </a:solidFill>
+              </a:rPr>
+              <a:t> Kft. Budapest Váci út</a:t>
+            </a:r>
+          </a:p>
+        </p:txBody>
+      </p:sp>
+      <p:pic>
+        <p:nvPicPr>
+          <p:cNvPr id="5" name="Tartalom helye 4" descr="A képen térkép, atlasz, szöveg látható&#10;&#10;Előfordulhat, hogy az AI által létrehozott tartalom helytelen.">
+            <a:extLst>
+              <a:ext uri="{FF2B5EF4-FFF2-40B4-BE49-F238E27FC236}">
+                <a16:creationId xmlns:a16="http://schemas.microsoft.com/office/drawing/2014/main" id="{C85A9C36-16BC-81DE-D65E-35251374B407}"/>
+              </a:ext>
+            </a:extLst>
+          </p:cNvPr>
+          <p:cNvPicPr>
+            <a:picLocks noGrp="1" noChangeAspect="1"/>
+          </p:cNvPicPr>
+          <p:nvPr>
+            <p:ph sz="half" idx="2"/>
+          </p:nvPr>
+        </p:nvPicPr>
+        <p:blipFill>
+          <a:blip r:embed="rId2">
+            <a:extLst>
+              <a:ext uri="{28A0092B-C50C-407E-A947-70E740481C1C}">
+                <a14:useLocalDpi xmlns:a14="http://schemas.microsoft.com/office/drawing/2010/main" val="0"/>
+              </a:ext>
+            </a:extLst>
+          </a:blip>
+          <a:stretch>
+            <a:fillRect/>
+          </a:stretch>
+        </p:blipFill>
+        <p:spPr>
+          <a:xfrm>
+            <a:off x="8318797" y="1825625"/>
+            <a:ext cx="3035003" cy="4552506"/>
+          </a:xfrm>
+          <a:prstGeom prst="rect">
+            <a:avLst/>
+          </a:prstGeom>
+        </p:spPr>
+      </p:pic>
+    </p:spTree>
+    <p:extLst>
+      <p:ext uri="{BB962C8B-B14F-4D97-AF65-F5344CB8AC3E}">
+        <p14:creationId xmlns:p14="http://schemas.microsoft.com/office/powerpoint/2010/main" val="4004811928"/>
+      </p:ext>
+    </p:extLst>
+  </p:cSld>
+  <p:clrMapOvr>
+    <a:masterClrMapping/>
+  </p:clrMapOvr>
+</p:sld>
+</file>
+
+<file path=ppt/slides/slide4.xml><?xml version="1.0" encoding="utf-8"?>
+<p:sld xmlns:a="http://schemas.openxmlformats.org/drawingml/2006/main" xmlns:r="http://schemas.openxmlformats.org/officeDocument/2006/relationships" xmlns:p="http://schemas.openxmlformats.org/presentationml/2006/main">
+  <p:cSld>
+    <p:spTree>
+      <p:nvGrpSpPr>
+        <p:cNvPr id="1" name=""/>
+        <p:cNvGrpSpPr/>
+        <p:nvPr/>
+      </p:nvGrpSpPr>
+      <p:grpSpPr>
+        <a:xfrm>
+          <a:off x="0" y="0"/>
+          <a:ext cx="0" cy="0"/>
+          <a:chOff x="0" y="0"/>
+          <a:chExt cx="0" cy="0"/>
+        </a:xfrm>
+      </p:grpSpPr>
+      <p:sp>
+        <p:nvSpPr>
+          <p:cNvPr id="2" name="Cím 1">
+            <a:extLst>
+              <a:ext uri="{FF2B5EF4-FFF2-40B4-BE49-F238E27FC236}">
+                <a16:creationId xmlns:a16="http://schemas.microsoft.com/office/drawing/2014/main" id="{7C56B86A-727D-FDE8-4501-413FC0FDA111}"/>
+              </a:ext>
+            </a:extLst>
+          </p:cNvPr>
+          <p:cNvSpPr>
+            <a:spLocks noGrp="1"/>
+          </p:cNvSpPr>
+          <p:nvPr>
+            <p:ph type="title"/>
+          </p:nvPr>
+        </p:nvSpPr>
+        <p:spPr/>
+        <p:txBody>
+          <a:bodyPr/>
+          <a:lstStyle/>
+          <a:p>
+            <a:r>
+              <a:rPr lang="hu-HU" b="1" dirty="0">
+                <a:solidFill>
+                  <a:schemeClr val="bg1"/>
+                </a:solidFill>
+              </a:rPr>
+              <a:t>Informatikai célkitűzések</a:t>
+            </a:r>
+          </a:p>
+        </p:txBody>
+      </p:sp>
+      <p:sp>
+        <p:nvSpPr>
+          <p:cNvPr id="3" name="Tartalom helye 2">
+            <a:extLst>
+              <a:ext uri="{FF2B5EF4-FFF2-40B4-BE49-F238E27FC236}">
+                <a16:creationId xmlns:a16="http://schemas.microsoft.com/office/drawing/2014/main" id="{FC5513BD-95DF-2D07-24E5-882BCB267450}"/>
+              </a:ext>
+            </a:extLst>
+          </p:cNvPr>
+          <p:cNvSpPr>
+            <a:spLocks noGrp="1"/>
+          </p:cNvSpPr>
+          <p:nvPr>
+            <p:ph idx="1"/>
+          </p:nvPr>
+        </p:nvSpPr>
+        <p:spPr/>
+        <p:txBody>
+          <a:bodyPr/>
+          <a:lstStyle/>
+          <a:p>
+            <a:pPr>
+              <a:lnSpc>
+                <a:spcPct val="150000"/>
+              </a:lnSpc>
+            </a:pPr>
+            <a:r>
+              <a:rPr lang="hu-HU" dirty="0">
+                <a:solidFill>
+                  <a:schemeClr val="bg1"/>
+                </a:solidFill>
+              </a:rPr>
+              <a:t>Központi felhasználókezelés</a:t>
+            </a:r>
+          </a:p>
+          <a:p>
+            <a:pPr>
+              <a:lnSpc>
+                <a:spcPct val="150000"/>
+              </a:lnSpc>
+            </a:pPr>
+            <a:r>
+              <a:rPr lang="hu-HU" dirty="0">
+                <a:solidFill>
+                  <a:schemeClr val="bg1"/>
+                </a:solidFill>
+              </a:rPr>
+              <a:t>Jogosultság alapú hozzáférés</a:t>
+            </a:r>
+          </a:p>
+          <a:p>
+            <a:pPr>
+              <a:lnSpc>
+                <a:spcPct val="150000"/>
+              </a:lnSpc>
+            </a:pPr>
+            <a:r>
+              <a:rPr lang="hu-HU" dirty="0">
+                <a:solidFill>
+                  <a:schemeClr val="bg1"/>
+                </a:solidFill>
+              </a:rPr>
+              <a:t>Magas rendelkezésre állás</a:t>
+            </a:r>
+          </a:p>
+          <a:p>
+            <a:pPr>
+              <a:lnSpc>
+                <a:spcPct val="150000"/>
+              </a:lnSpc>
+            </a:pPr>
+            <a:r>
+              <a:rPr lang="hu-HU" dirty="0">
+                <a:solidFill>
+                  <a:schemeClr val="bg1"/>
+                </a:solidFill>
+              </a:rPr>
+              <a:t>Biztonságos adatkezelés</a:t>
+            </a:r>
+          </a:p>
+          <a:p>
+            <a:pPr>
+              <a:lnSpc>
+                <a:spcPct val="150000"/>
+              </a:lnSpc>
+            </a:pPr>
+            <a:r>
+              <a:rPr lang="hu-HU" dirty="0">
+                <a:solidFill>
+                  <a:schemeClr val="bg1"/>
+                </a:solidFill>
+              </a:rPr>
+              <a:t>Skálázhatóság</a:t>
+            </a:r>
+          </a:p>
+        </p:txBody>
+      </p:sp>
+    </p:spTree>
+    <p:extLst>
+      <p:ext uri="{BB962C8B-B14F-4D97-AF65-F5344CB8AC3E}">
+        <p14:creationId xmlns:p14="http://schemas.microsoft.com/office/powerpoint/2010/main" val="2252587116"/>
+      </p:ext>
+    </p:extLst>
+  </p:cSld>
+  <p:clrMapOvr>
+    <a:masterClrMapping/>
+  </p:clrMapOvr>
+</p:sld>
+</file>
+
+<file path=ppt/slides/slide5.xml><?xml version="1.0" encoding="utf-8"?>
+<p:sld xmlns:a="http://schemas.openxmlformats.org/drawingml/2006/main" xmlns:r="http://schemas.openxmlformats.org/officeDocument/2006/relationships" xmlns:p="http://schemas.openxmlformats.org/presentationml/2006/main">
+  <p:cSld>
+    <p:spTree>
+      <p:nvGrpSpPr>
+        <p:cNvPr id="1" name=""/>
+        <p:cNvGrpSpPr/>
+        <p:nvPr/>
+      </p:nvGrpSpPr>
+      <p:grpSpPr>
+        <a:xfrm>
+          <a:off x="0" y="0"/>
+          <a:ext cx="0" cy="0"/>
+          <a:chOff x="0" y="0"/>
+          <a:chExt cx="0" cy="0"/>
+        </a:xfrm>
+      </p:grpSpPr>
+      <p:sp>
+        <p:nvSpPr>
+          <p:cNvPr id="2" name="Cím 1">
+            <a:extLst>
+              <a:ext uri="{FF2B5EF4-FFF2-40B4-BE49-F238E27FC236}">
+                <a16:creationId xmlns:a16="http://schemas.microsoft.com/office/drawing/2014/main" id="{977343D6-C8F2-D95C-73D2-30B8FF2E82B4}"/>
+              </a:ext>
+            </a:extLst>
+          </p:cNvPr>
+          <p:cNvSpPr>
+            <a:spLocks noGrp="1"/>
+          </p:cNvSpPr>
+          <p:nvPr>
+            <p:ph type="title"/>
+          </p:nvPr>
+        </p:nvSpPr>
+        <p:spPr/>
+        <p:txBody>
+          <a:bodyPr/>
+          <a:lstStyle/>
+          <a:p>
+            <a:r>
+              <a:rPr lang="hu-HU" b="1" dirty="0">
+                <a:solidFill>
+                  <a:schemeClr val="bg1"/>
+                </a:solidFill>
+              </a:rPr>
+              <a:t>Hálózati topológia</a:t>
+            </a:r>
+          </a:p>
+        </p:txBody>
+      </p:sp>
+      <p:pic>
+        <p:nvPicPr>
+          <p:cNvPr id="5" name="Tartalom helye 4" descr="A képen térkép, diagram, szöveg, sor látható&#10;&#10;Előfordulhat, hogy az AI által létrehozott tartalom helytelen.">
+            <a:extLst>
+              <a:ext uri="{FF2B5EF4-FFF2-40B4-BE49-F238E27FC236}">
+                <a16:creationId xmlns:a16="http://schemas.microsoft.com/office/drawing/2014/main" id="{BAC71072-7C6F-D88D-E2A9-398ADA09D506}"/>
+              </a:ext>
+            </a:extLst>
+          </p:cNvPr>
+          <p:cNvPicPr>
+            <a:picLocks noGrp="1" noChangeAspect="1"/>
+          </p:cNvPicPr>
+          <p:nvPr>
+            <p:ph idx="1"/>
+          </p:nvPr>
+        </p:nvPicPr>
+        <p:blipFill>
+          <a:blip r:embed="rId2"/>
+          <a:stretch>
+            <a:fillRect/>
+          </a:stretch>
+        </p:blipFill>
+        <p:spPr>
+          <a:xfrm>
+            <a:off x="2019143" y="1690688"/>
+            <a:ext cx="8153714" cy="4797728"/>
+          </a:xfrm>
+          <a:prstGeom prst="rect">
+            <a:avLst/>
+          </a:prstGeom>
+        </p:spPr>
+      </p:pic>
+    </p:spTree>
+    <p:extLst>
+      <p:ext uri="{BB962C8B-B14F-4D97-AF65-F5344CB8AC3E}">
+        <p14:creationId xmlns:p14="http://schemas.microsoft.com/office/powerpoint/2010/main" val="2642662234"/>
+      </p:ext>
+    </p:extLst>
+  </p:cSld>
+  <p:clrMapOvr>
+    <a:masterClrMapping/>
+  </p:clrMapOvr>
+</p:sld>
+</file>
+
+<file path=ppt/slides/slide6.xml><?xml version="1.0" encoding="utf-8"?>
+<p:sld xmlns:a="http://schemas.openxmlformats.org/drawingml/2006/main" xmlns:r="http://schemas.openxmlformats.org/officeDocument/2006/relationships" xmlns:p="http://schemas.openxmlformats.org/presentationml/2006/main">
+  <p:cSld>
+    <p:spTree>
+      <p:nvGrpSpPr>
+        <p:cNvPr id="1" name=""/>
+        <p:cNvGrpSpPr/>
+        <p:nvPr/>
+      </p:nvGrpSpPr>
+      <p:grpSpPr>
+        <a:xfrm>
+          <a:off x="0" y="0"/>
+          <a:ext cx="0" cy="0"/>
+          <a:chOff x="0" y="0"/>
+          <a:chExt cx="0" cy="0"/>
+        </a:xfrm>
+      </p:grpSpPr>
+      <p:sp>
+        <p:nvSpPr>
+          <p:cNvPr id="2" name="Cím 1">
+            <a:extLst>
+              <a:ext uri="{FF2B5EF4-FFF2-40B4-BE49-F238E27FC236}">
+                <a16:creationId xmlns:a16="http://schemas.microsoft.com/office/drawing/2014/main" id="{030ADD49-6333-4730-CF1D-C4F7DA0F9564}"/>
+              </a:ext>
+            </a:extLst>
+          </p:cNvPr>
+          <p:cNvSpPr>
+            <a:spLocks noGrp="1"/>
+          </p:cNvSpPr>
+          <p:nvPr>
+            <p:ph type="title"/>
+          </p:nvPr>
+        </p:nvSpPr>
+        <p:spPr/>
+        <p:txBody>
+          <a:bodyPr/>
+          <a:lstStyle/>
+          <a:p>
+            <a:r>
+              <a:rPr lang="hu-HU" b="1" dirty="0" err="1">
+                <a:solidFill>
+                  <a:schemeClr val="bg1"/>
+                </a:solidFill>
+              </a:rPr>
+              <a:t>Active</a:t>
+            </a:r>
+            <a:r>
+              <a:rPr lang="hu-HU" b="1" dirty="0">
+                <a:solidFill>
+                  <a:schemeClr val="bg1"/>
+                </a:solidFill>
+              </a:rPr>
+              <a:t> </a:t>
+            </a:r>
+            <a:r>
+              <a:rPr lang="hu-HU" b="1" dirty="0" err="1">
+                <a:solidFill>
+                  <a:schemeClr val="bg1"/>
+                </a:solidFill>
+              </a:rPr>
+              <a:t>Directory</a:t>
+            </a:r>
+            <a:r>
+              <a:rPr lang="hu-HU" b="1" dirty="0">
+                <a:solidFill>
+                  <a:schemeClr val="bg1"/>
+                </a:solidFill>
+              </a:rPr>
+              <a:t> szerepe</a:t>
+            </a:r>
+          </a:p>
+        </p:txBody>
+      </p:sp>
+      <p:sp>
+        <p:nvSpPr>
+          <p:cNvPr id="3" name="Tartalom helye 2">
+            <a:extLst>
+              <a:ext uri="{FF2B5EF4-FFF2-40B4-BE49-F238E27FC236}">
+                <a16:creationId xmlns:a16="http://schemas.microsoft.com/office/drawing/2014/main" id="{205EDD9C-CE08-7B91-8D18-FA01D3A2F699}"/>
+              </a:ext>
+            </a:extLst>
+          </p:cNvPr>
+          <p:cNvSpPr>
+            <a:spLocks noGrp="1"/>
+          </p:cNvSpPr>
+          <p:nvPr>
+            <p:ph idx="1"/>
+          </p:nvPr>
+        </p:nvSpPr>
+        <p:spPr/>
+        <p:txBody>
+          <a:bodyPr/>
+          <a:lstStyle/>
+          <a:p>
+            <a:pPr>
+              <a:lnSpc>
+                <a:spcPct val="150000"/>
+              </a:lnSpc>
+            </a:pPr>
+            <a:r>
+              <a:rPr lang="hu-HU" dirty="0">
+                <a:solidFill>
+                  <a:schemeClr val="bg1"/>
+                </a:solidFill>
+              </a:rPr>
+              <a:t>Központi hitelesítés</a:t>
+            </a:r>
+          </a:p>
+          <a:p>
+            <a:pPr>
+              <a:lnSpc>
+                <a:spcPct val="150000"/>
+              </a:lnSpc>
+            </a:pPr>
+            <a:r>
+              <a:rPr lang="hu-HU" dirty="0">
+                <a:solidFill>
+                  <a:schemeClr val="bg1"/>
+                </a:solidFill>
+              </a:rPr>
+              <a:t>Felhasználókezelés</a:t>
+            </a:r>
+          </a:p>
+          <a:p>
+            <a:pPr>
+              <a:lnSpc>
+                <a:spcPct val="150000"/>
+              </a:lnSpc>
+            </a:pPr>
+            <a:r>
+              <a:rPr lang="hu-HU" dirty="0">
+                <a:solidFill>
+                  <a:schemeClr val="bg1"/>
+                </a:solidFill>
+              </a:rPr>
+              <a:t>Csoportalapú jogosultság</a:t>
+            </a:r>
+          </a:p>
+          <a:p>
+            <a:pPr>
+              <a:lnSpc>
+                <a:spcPct val="150000"/>
+              </a:lnSpc>
+            </a:pPr>
+            <a:r>
+              <a:rPr lang="hu-HU" dirty="0">
+                <a:solidFill>
+                  <a:schemeClr val="bg1"/>
+                </a:solidFill>
+              </a:rPr>
+              <a:t>Erőforrás-hozzáférés szabályozása</a:t>
+            </a:r>
+          </a:p>
+        </p:txBody>
+      </p:sp>
+    </p:spTree>
+    <p:extLst>
+      <p:ext uri="{BB962C8B-B14F-4D97-AF65-F5344CB8AC3E}">
+        <p14:creationId xmlns:p14="http://schemas.microsoft.com/office/powerpoint/2010/main" val="3111721896"/>
+      </p:ext>
+    </p:extLst>
+  </p:cSld>
+  <p:clrMapOvr>
+    <a:masterClrMapping/>
+  </p:clrMapOvr>
+</p:sld>
+</file>
+
+<file path=ppt/slides/slide7.xml><?xml version="1.0" encoding="utf-8"?>
+<p:sld xmlns:a="http://schemas.openxmlformats.org/drawingml/2006/main" xmlns:r="http://schemas.openxmlformats.org/officeDocument/2006/relationships" xmlns:p="http://schemas.openxmlformats.org/presentationml/2006/main">
+  <p:cSld>
+    <p:spTree>
+      <p:nvGrpSpPr>
+        <p:cNvPr id="1" name=""/>
+        <p:cNvGrpSpPr/>
+        <p:nvPr/>
+      </p:nvGrpSpPr>
+      <p:grpSpPr>
+        <a:xfrm>
+          <a:off x="0" y="0"/>
+          <a:ext cx="0" cy="0"/>
+          <a:chOff x="0" y="0"/>
+          <a:chExt cx="0" cy="0"/>
+        </a:xfrm>
+      </p:grpSpPr>
+      <p:sp>
+        <p:nvSpPr>
+          <p:cNvPr id="2" name="Cím 1">
+            <a:extLst>
+              <a:ext uri="{FF2B5EF4-FFF2-40B4-BE49-F238E27FC236}">
+                <a16:creationId xmlns:a16="http://schemas.microsoft.com/office/drawing/2014/main" id="{5A057299-C548-8DC3-55D8-9B66C76EE640}"/>
+              </a:ext>
+            </a:extLst>
+          </p:cNvPr>
+          <p:cNvSpPr>
+            <a:spLocks noGrp="1"/>
+          </p:cNvSpPr>
+          <p:nvPr>
+            <p:ph type="title"/>
+          </p:nvPr>
+        </p:nvSpPr>
+        <p:spPr/>
+        <p:txBody>
+          <a:bodyPr/>
+          <a:lstStyle/>
+          <a:p>
+            <a:r>
+              <a:rPr lang="hu-HU" b="1" dirty="0" err="1">
+                <a:solidFill>
+                  <a:schemeClr val="bg1"/>
+                </a:solidFill>
+              </a:rPr>
+              <a:t>Domain</a:t>
+            </a:r>
+            <a:r>
+              <a:rPr lang="hu-HU" b="1" dirty="0">
+                <a:solidFill>
+                  <a:schemeClr val="bg1"/>
+                </a:solidFill>
+              </a:rPr>
+              <a:t> struktúra</a:t>
+            </a:r>
+          </a:p>
+        </p:txBody>
+      </p:sp>
+      <p:sp>
+        <p:nvSpPr>
+          <p:cNvPr id="3" name="Tartalom helye 2">
+            <a:extLst>
+              <a:ext uri="{FF2B5EF4-FFF2-40B4-BE49-F238E27FC236}">
+                <a16:creationId xmlns:a16="http://schemas.microsoft.com/office/drawing/2014/main" id="{DADB65EA-2206-9F6E-1B34-8A188FF61ECB}"/>
+              </a:ext>
+            </a:extLst>
+          </p:cNvPr>
+          <p:cNvSpPr>
+            <a:spLocks noGrp="1"/>
+          </p:cNvSpPr>
+          <p:nvPr>
+            <p:ph sz="half" idx="1"/>
+          </p:nvPr>
+        </p:nvSpPr>
+        <p:spPr>
+          <a:xfrm>
+            <a:off x="838200" y="1825625"/>
+            <a:ext cx="6358128" cy="4351338"/>
+          </a:xfrm>
+        </p:spPr>
+        <p:txBody>
+          <a:bodyPr/>
+          <a:lstStyle/>
+          <a:p>
+            <a:pPr>
+              <a:lnSpc>
+                <a:spcPct val="150000"/>
+              </a:lnSpc>
+            </a:pPr>
+            <a:r>
+              <a:rPr lang="hu-HU" dirty="0" err="1">
+                <a:solidFill>
+                  <a:schemeClr val="bg1"/>
+                </a:solidFill>
+              </a:rPr>
+              <a:t>Egydomaines</a:t>
+            </a:r>
+            <a:r>
+              <a:rPr lang="hu-HU" dirty="0">
+                <a:solidFill>
+                  <a:schemeClr val="bg1"/>
+                </a:solidFill>
+              </a:rPr>
+              <a:t> környezet</a:t>
+            </a:r>
+          </a:p>
+          <a:p>
+            <a:pPr>
+              <a:lnSpc>
+                <a:spcPct val="150000"/>
+              </a:lnSpc>
+            </a:pPr>
+            <a:r>
+              <a:rPr lang="hu-HU" dirty="0">
+                <a:solidFill>
+                  <a:schemeClr val="bg1"/>
+                </a:solidFill>
+              </a:rPr>
+              <a:t>Részleg alapú OU-struktúra</a:t>
+            </a:r>
+          </a:p>
+          <a:p>
+            <a:pPr>
+              <a:lnSpc>
+                <a:spcPct val="150000"/>
+              </a:lnSpc>
+            </a:pPr>
+            <a:r>
+              <a:rPr lang="hu-HU" dirty="0">
+                <a:solidFill>
+                  <a:schemeClr val="bg1"/>
+                </a:solidFill>
+              </a:rPr>
+              <a:t>Külön Service </a:t>
+            </a:r>
+            <a:r>
+              <a:rPr lang="hu-HU" dirty="0" err="1">
+                <a:solidFill>
+                  <a:schemeClr val="bg1"/>
+                </a:solidFill>
+              </a:rPr>
+              <a:t>Accounts</a:t>
+            </a:r>
+            <a:r>
+              <a:rPr lang="hu-HU" dirty="0">
+                <a:solidFill>
+                  <a:schemeClr val="bg1"/>
+                </a:solidFill>
+              </a:rPr>
+              <a:t> tároló</a:t>
+            </a:r>
+          </a:p>
+          <a:p>
+            <a:pPr>
+              <a:lnSpc>
+                <a:spcPct val="150000"/>
+              </a:lnSpc>
+            </a:pPr>
+            <a:r>
+              <a:rPr lang="hu-HU" dirty="0">
+                <a:solidFill>
+                  <a:schemeClr val="bg1"/>
+                </a:solidFill>
+              </a:rPr>
+              <a:t>Célzott GPO alkalmazás OU szinten</a:t>
+            </a:r>
+          </a:p>
+        </p:txBody>
+      </p:sp>
+      <p:pic>
+        <p:nvPicPr>
+          <p:cNvPr id="6" name="Tartalom helye 5" descr="A képen szöveg, képernyőkép, Betűtípus, szám látható&#10;&#10;Előfordulhat, hogy az AI által létrehozott tartalom helytelen.">
+            <a:extLst>
+              <a:ext uri="{FF2B5EF4-FFF2-40B4-BE49-F238E27FC236}">
+                <a16:creationId xmlns:a16="http://schemas.microsoft.com/office/drawing/2014/main" id="{94C0D490-9886-09E7-1E26-FF27F8A2B888}"/>
+              </a:ext>
+            </a:extLst>
+          </p:cNvPr>
+          <p:cNvPicPr>
+            <a:picLocks noGrp="1" noChangeAspect="1"/>
+          </p:cNvPicPr>
+          <p:nvPr>
+            <p:ph sz="half" idx="2"/>
+          </p:nvPr>
+        </p:nvPicPr>
+        <p:blipFill>
+          <a:blip r:embed="rId2"/>
+          <a:stretch>
+            <a:fillRect/>
+          </a:stretch>
+        </p:blipFill>
+        <p:spPr>
+          <a:xfrm>
+            <a:off x="8104700" y="678846"/>
+            <a:ext cx="2246308" cy="5500307"/>
+          </a:xfrm>
+          <a:prstGeom prst="rect">
+            <a:avLst/>
+          </a:prstGeom>
+        </p:spPr>
+      </p:pic>
+    </p:spTree>
+    <p:extLst>
+      <p:ext uri="{BB962C8B-B14F-4D97-AF65-F5344CB8AC3E}">
+        <p14:creationId xmlns:p14="http://schemas.microsoft.com/office/powerpoint/2010/main" val="1757055487"/>
+      </p:ext>
+    </p:extLst>
+  </p:cSld>
+  <p:clrMapOvr>
+    <a:masterClrMapping/>
+  </p:clrMapOvr>
+</p:sld>
+</file>
+
+<file path=ppt/slides/slide8.xml><?xml version="1.0" encoding="utf-8"?>
+<p:sld xmlns:a="http://schemas.openxmlformats.org/drawingml/2006/main" xmlns:r="http://schemas.openxmlformats.org/officeDocument/2006/relationships" xmlns:p="http://schemas.openxmlformats.org/presentationml/2006/main">
+  <p:cSld>
+    <p:spTree>
+      <p:nvGrpSpPr>
+        <p:cNvPr id="1" name=""/>
+        <p:cNvGrpSpPr/>
+        <p:nvPr/>
+      </p:nvGrpSpPr>
+      <p:grpSpPr>
+        <a:xfrm>
+          <a:off x="0" y="0"/>
+          <a:ext cx="0" cy="0"/>
+          <a:chOff x="0" y="0"/>
+          <a:chExt cx="0" cy="0"/>
+        </a:xfrm>
+      </p:grpSpPr>
+      <p:sp>
+        <p:nvSpPr>
+          <p:cNvPr id="2" name="Cím 1">
+            <a:extLst>
+              <a:ext uri="{FF2B5EF4-FFF2-40B4-BE49-F238E27FC236}">
+                <a16:creationId xmlns:a16="http://schemas.microsoft.com/office/drawing/2014/main" id="{F0230E53-9566-10F7-FBA9-D8EB79CDC3D2}"/>
+              </a:ext>
+            </a:extLst>
+          </p:cNvPr>
+          <p:cNvSpPr>
+            <a:spLocks noGrp="1"/>
+          </p:cNvSpPr>
+          <p:nvPr>
+            <p:ph type="title"/>
+          </p:nvPr>
+        </p:nvSpPr>
+        <p:spPr/>
+        <p:txBody>
+          <a:bodyPr/>
+          <a:lstStyle/>
+          <a:p>
+            <a:r>
+              <a:rPr lang="hu-HU" b="1" dirty="0">
+                <a:solidFill>
+                  <a:schemeClr val="bg1"/>
+                </a:solidFill>
+              </a:rPr>
+              <a:t>Jelszóházirend</a:t>
+            </a:r>
+          </a:p>
+        </p:txBody>
+      </p:sp>
+      <p:sp>
+        <p:nvSpPr>
+          <p:cNvPr id="3" name="Tartalom helye 2">
+            <a:extLst>
+              <a:ext uri="{FF2B5EF4-FFF2-40B4-BE49-F238E27FC236}">
+                <a16:creationId xmlns:a16="http://schemas.microsoft.com/office/drawing/2014/main" id="{DE58BD7A-C4EA-0DAB-BAF9-44D2CC152C9B}"/>
+              </a:ext>
+            </a:extLst>
+          </p:cNvPr>
+          <p:cNvSpPr>
+            <a:spLocks noGrp="1"/>
+          </p:cNvSpPr>
+          <p:nvPr>
+            <p:ph sz="half" idx="1"/>
+          </p:nvPr>
+        </p:nvSpPr>
+        <p:spPr>
+          <a:xfrm>
+            <a:off x="838200" y="1825625"/>
+            <a:ext cx="3203448" cy="4351338"/>
+          </a:xfrm>
+        </p:spPr>
+        <p:txBody>
+          <a:bodyPr/>
+          <a:lstStyle/>
+          <a:p>
+            <a:pPr>
+              <a:lnSpc>
+                <a:spcPct val="150000"/>
+              </a:lnSpc>
+            </a:pPr>
+            <a:r>
+              <a:rPr lang="hu-HU" dirty="0">
+                <a:solidFill>
+                  <a:schemeClr val="bg1"/>
+                </a:solidFill>
+              </a:rPr>
+              <a:t>Kötelező jelszócsere első bejelentkezéskor</a:t>
+            </a:r>
+          </a:p>
+          <a:p>
+            <a:pPr>
+              <a:lnSpc>
+                <a:spcPct val="150000"/>
+              </a:lnSpc>
+            </a:pPr>
+            <a:r>
+              <a:rPr lang="hu-HU" dirty="0">
+                <a:solidFill>
+                  <a:schemeClr val="bg1"/>
+                </a:solidFill>
+              </a:rPr>
+              <a:t>90 napos lejárat</a:t>
+            </a:r>
+          </a:p>
+          <a:p>
+            <a:pPr>
+              <a:lnSpc>
+                <a:spcPct val="150000"/>
+              </a:lnSpc>
+            </a:pPr>
+            <a:r>
+              <a:rPr lang="hu-HU" dirty="0">
+                <a:solidFill>
+                  <a:schemeClr val="bg1"/>
+                </a:solidFill>
+              </a:rPr>
+              <a:t>5 korábbi jelszó megjegyzése</a:t>
+            </a:r>
+          </a:p>
+        </p:txBody>
+      </p:sp>
+      <p:pic>
+        <p:nvPicPr>
+          <p:cNvPr id="6" name="Tartalom helye 5" descr="A képen szöveg, képernyőkép, szoftver, Weblap látható&#10;&#10;Előfordulhat, hogy az AI által létrehozott tartalom helytelen.">
+            <a:extLst>
+              <a:ext uri="{FF2B5EF4-FFF2-40B4-BE49-F238E27FC236}">
+                <a16:creationId xmlns:a16="http://schemas.microsoft.com/office/drawing/2014/main" id="{C251F1FB-3960-EA67-3D44-EF2AAEA84177}"/>
+              </a:ext>
+            </a:extLst>
+          </p:cNvPr>
+          <p:cNvPicPr>
+            <a:picLocks noGrp="1" noChangeAspect="1"/>
+          </p:cNvPicPr>
+          <p:nvPr>
+            <p:ph sz="half" idx="2"/>
+          </p:nvPr>
+        </p:nvPicPr>
+        <p:blipFill>
+          <a:blip r:embed="rId2">
+            <a:extLst>
+              <a:ext uri="{28A0092B-C50C-407E-A947-70E740481C1C}">
+                <a14:useLocalDpi xmlns:a14="http://schemas.microsoft.com/office/drawing/2010/main" val="0"/>
+              </a:ext>
+            </a:extLst>
+          </a:blip>
+          <a:stretch>
+            <a:fillRect/>
+          </a:stretch>
+        </p:blipFill>
+        <p:spPr>
+          <a:xfrm>
+            <a:off x="4279392" y="1807952"/>
+            <a:ext cx="7074408" cy="4369011"/>
+          </a:xfrm>
+          <a:prstGeom prst="rect">
+            <a:avLst/>
+          </a:prstGeom>
+        </p:spPr>
+      </p:pic>
+    </p:spTree>
+    <p:extLst>
+      <p:ext uri="{BB962C8B-B14F-4D97-AF65-F5344CB8AC3E}">
+        <p14:creationId xmlns:p14="http://schemas.microsoft.com/office/powerpoint/2010/main" val="545465565"/>
+      </p:ext>
+    </p:extLst>
+  </p:cSld>
+  <p:clrMapOvr>
+    <a:masterClrMapping/>
+  </p:clrMapOvr>
+</p:sld>
+</file>
+
+<file path=ppt/slides/slide9.xml><?xml version="1.0" encoding="utf-8"?>
+<p:sld xmlns:a="http://schemas.openxmlformats.org/drawingml/2006/main" xmlns:r="http://schemas.openxmlformats.org/officeDocument/2006/relationships" xmlns:p="http://schemas.openxmlformats.org/presentationml/2006/main">
+  <p:cSld>
+    <p:spTree>
+      <p:nvGrpSpPr>
+        <p:cNvPr id="1" name=""/>
+        <p:cNvGrpSpPr/>
+        <p:nvPr/>
+      </p:nvGrpSpPr>
+      <p:grpSpPr>
+        <a:xfrm>
+          <a:off x="0" y="0"/>
+          <a:ext cx="0" cy="0"/>
+          <a:chOff x="0" y="0"/>
+          <a:chExt cx="0" cy="0"/>
+        </a:xfrm>
+      </p:grpSpPr>
+      <p:sp>
+        <p:nvSpPr>
+          <p:cNvPr id="2" name="Cím 1">
+            <a:extLst>
+              <a:ext uri="{FF2B5EF4-FFF2-40B4-BE49-F238E27FC236}">
+                <a16:creationId xmlns:a16="http://schemas.microsoft.com/office/drawing/2014/main" id="{0B342DDE-1E0E-26A9-5A31-24EFBDEEA78C}"/>
+              </a:ext>
+            </a:extLst>
+          </p:cNvPr>
+          <p:cNvSpPr>
+            <a:spLocks noGrp="1"/>
+          </p:cNvSpPr>
+          <p:nvPr>
+            <p:ph type="title"/>
+          </p:nvPr>
+        </p:nvSpPr>
+        <p:spPr/>
+        <p:txBody>
+          <a:bodyPr/>
+          <a:lstStyle/>
+          <a:p>
+            <a:r>
+              <a:rPr lang="hu-HU" b="1" dirty="0">
+                <a:solidFill>
+                  <a:schemeClr val="bg1"/>
+                </a:solidFill>
+              </a:rPr>
+              <a:t>Csoportalapú jogosultságkezelés</a:t>
+            </a:r>
+          </a:p>
+        </p:txBody>
+      </p:sp>
+      <p:sp>
+        <p:nvSpPr>
+          <p:cNvPr id="3" name="Tartalom helye 2">
+            <a:extLst>
+              <a:ext uri="{FF2B5EF4-FFF2-40B4-BE49-F238E27FC236}">
+                <a16:creationId xmlns:a16="http://schemas.microsoft.com/office/drawing/2014/main" id="{81ADA089-55CD-F1CF-758F-71CE24B0631F}"/>
+              </a:ext>
+            </a:extLst>
+          </p:cNvPr>
+          <p:cNvSpPr>
+            <a:spLocks noGrp="1"/>
+          </p:cNvSpPr>
+          <p:nvPr>
+            <p:ph sz="half" idx="1"/>
+          </p:nvPr>
+        </p:nvSpPr>
+        <p:spPr/>
+        <p:txBody>
+          <a:bodyPr/>
+          <a:lstStyle/>
+          <a:p>
+            <a:pPr>
+              <a:lnSpc>
+                <a:spcPct val="150000"/>
+              </a:lnSpc>
+            </a:pPr>
+            <a:r>
+              <a:rPr lang="hu-HU" dirty="0" err="1">
+                <a:solidFill>
+                  <a:schemeClr val="bg1"/>
+                </a:solidFill>
+              </a:rPr>
+              <a:t>Security</a:t>
+            </a:r>
+            <a:r>
+              <a:rPr lang="hu-HU" dirty="0">
+                <a:solidFill>
+                  <a:schemeClr val="bg1"/>
+                </a:solidFill>
+              </a:rPr>
+              <a:t> Group alapú modell</a:t>
+            </a:r>
+          </a:p>
+          <a:p>
+            <a:pPr>
+              <a:lnSpc>
+                <a:spcPct val="150000"/>
+              </a:lnSpc>
+            </a:pPr>
+            <a:r>
+              <a:rPr lang="hu-HU" dirty="0">
+                <a:solidFill>
+                  <a:schemeClr val="bg1"/>
+                </a:solidFill>
+              </a:rPr>
+              <a:t>Jogosultságok csoporthoz rendelve</a:t>
+            </a:r>
+          </a:p>
+          <a:p>
+            <a:pPr>
+              <a:lnSpc>
+                <a:spcPct val="150000"/>
+              </a:lnSpc>
+            </a:pPr>
+            <a:r>
+              <a:rPr lang="hu-HU" dirty="0">
+                <a:solidFill>
+                  <a:schemeClr val="bg1"/>
+                </a:solidFill>
+              </a:rPr>
+              <a:t>Nem egyéni felhasználókhoz</a:t>
+            </a:r>
+          </a:p>
+        </p:txBody>
+      </p:sp>
+      <p:pic>
+        <p:nvPicPr>
+          <p:cNvPr id="7" name="Tartalom helye 6" descr="A képen szöveg, képernyőkép, szoftver, képernyő látható&#10;&#10;Előfordulhat, hogy az AI által létrehozott tartalom helytelen.">
+            <a:extLst>
+              <a:ext uri="{FF2B5EF4-FFF2-40B4-BE49-F238E27FC236}">
+                <a16:creationId xmlns:a16="http://schemas.microsoft.com/office/drawing/2014/main" id="{7E7EF6B3-AA6B-EC70-BCF9-6C0BC967A142}"/>
+              </a:ext>
+            </a:extLst>
+          </p:cNvPr>
+          <p:cNvPicPr>
+            <a:picLocks noGrp="1" noChangeAspect="1"/>
+          </p:cNvPicPr>
+          <p:nvPr>
+            <p:ph sz="half" idx="2"/>
+          </p:nvPr>
+        </p:nvPicPr>
+        <p:blipFill>
+          <a:blip r:embed="rId2">
+            <a:extLst>
+              <a:ext uri="{28A0092B-C50C-407E-A947-70E740481C1C}">
+                <a14:useLocalDpi xmlns:a14="http://schemas.microsoft.com/office/drawing/2010/main" val="0"/>
+              </a:ext>
+            </a:extLst>
+          </a:blip>
+          <a:stretch>
+            <a:fillRect/>
+          </a:stretch>
+        </p:blipFill>
+        <p:spPr>
+          <a:xfrm>
+            <a:off x="7048260" y="1867396"/>
+            <a:ext cx="3429479" cy="4267796"/>
+          </a:xfrm>
+          <a:prstGeom prst="rect">
+            <a:avLst/>
+          </a:prstGeom>
+        </p:spPr>
+      </p:pic>
+    </p:spTree>
+    <p:extLst>
+      <p:ext uri="{BB962C8B-B14F-4D97-AF65-F5344CB8AC3E}">
+        <p14:creationId xmlns:p14="http://schemas.microsoft.com/office/powerpoint/2010/main" val="2188283591"/>
       </p:ext>
     </p:extLst>
   </p:cSld>

--- a/Final/Utli Barnabás bemutato.pptx
+++ b/Final/Utli Barnabás bemutato.pptx
@@ -282,7 +282,7 @@
           <a:p>
             <a:fld id="{274D99E6-559B-4424-821D-44BF482F5060}" type="datetimeFigureOut">
               <a:rPr lang="hu-HU" smtClean="0"/>
-              <a:t>2026. 02. 27.</a:t>
+              <a:t>2026. 03. 05.</a:t>
             </a:fld>
             <a:endParaRPr lang="hu-HU"/>
           </a:p>
@@ -480,7 +480,7 @@
           <a:p>
             <a:fld id="{274D99E6-559B-4424-821D-44BF482F5060}" type="datetimeFigureOut">
               <a:rPr lang="hu-HU" smtClean="0"/>
-              <a:t>2026. 02. 27.</a:t>
+              <a:t>2026. 03. 05.</a:t>
             </a:fld>
             <a:endParaRPr lang="hu-HU"/>
           </a:p>
@@ -688,7 +688,7 @@
           <a:p>
             <a:fld id="{274D99E6-559B-4424-821D-44BF482F5060}" type="datetimeFigureOut">
               <a:rPr lang="hu-HU" smtClean="0"/>
-              <a:t>2026. 02. 27.</a:t>
+              <a:t>2026. 03. 05.</a:t>
             </a:fld>
             <a:endParaRPr lang="hu-HU"/>
           </a:p>
@@ -886,7 +886,7 @@
           <a:p>
             <a:fld id="{274D99E6-559B-4424-821D-44BF482F5060}" type="datetimeFigureOut">
               <a:rPr lang="hu-HU" smtClean="0"/>
-              <a:t>2026. 02. 27.</a:t>
+              <a:t>2026. 03. 05.</a:t>
             </a:fld>
             <a:endParaRPr lang="hu-HU"/>
           </a:p>
@@ -1161,7 +1161,7 @@
           <a:p>
             <a:fld id="{274D99E6-559B-4424-821D-44BF482F5060}" type="datetimeFigureOut">
               <a:rPr lang="hu-HU" smtClean="0"/>
-              <a:t>2026. 02. 27.</a:t>
+              <a:t>2026. 03. 05.</a:t>
             </a:fld>
             <a:endParaRPr lang="hu-HU"/>
           </a:p>
@@ -1426,7 +1426,7 @@
           <a:p>
             <a:fld id="{274D99E6-559B-4424-821D-44BF482F5060}" type="datetimeFigureOut">
               <a:rPr lang="hu-HU" smtClean="0"/>
-              <a:t>2026. 02. 27.</a:t>
+              <a:t>2026. 03. 05.</a:t>
             </a:fld>
             <a:endParaRPr lang="hu-HU"/>
           </a:p>
@@ -1838,7 +1838,7 @@
           <a:p>
             <a:fld id="{274D99E6-559B-4424-821D-44BF482F5060}" type="datetimeFigureOut">
               <a:rPr lang="hu-HU" smtClean="0"/>
-              <a:t>2026. 02. 27.</a:t>
+              <a:t>2026. 03. 05.</a:t>
             </a:fld>
             <a:endParaRPr lang="hu-HU"/>
           </a:p>
@@ -1979,7 +1979,7 @@
           <a:p>
             <a:fld id="{274D99E6-559B-4424-821D-44BF482F5060}" type="datetimeFigureOut">
               <a:rPr lang="hu-HU" smtClean="0"/>
-              <a:t>2026. 02. 27.</a:t>
+              <a:t>2026. 03. 05.</a:t>
             </a:fld>
             <a:endParaRPr lang="hu-HU"/>
           </a:p>
@@ -2092,7 +2092,7 @@
           <a:p>
             <a:fld id="{274D99E6-559B-4424-821D-44BF482F5060}" type="datetimeFigureOut">
               <a:rPr lang="hu-HU" smtClean="0"/>
-              <a:t>2026. 02. 27.</a:t>
+              <a:t>2026. 03. 05.</a:t>
             </a:fld>
             <a:endParaRPr lang="hu-HU"/>
           </a:p>
@@ -2403,7 +2403,7 @@
           <a:p>
             <a:fld id="{274D99E6-559B-4424-821D-44BF482F5060}" type="datetimeFigureOut">
               <a:rPr lang="hu-HU" smtClean="0"/>
-              <a:t>2026. 02. 27.</a:t>
+              <a:t>2026. 03. 05.</a:t>
             </a:fld>
             <a:endParaRPr lang="hu-HU"/>
           </a:p>
@@ -2691,7 +2691,7 @@
           <a:p>
             <a:fld id="{274D99E6-559B-4424-821D-44BF482F5060}" type="datetimeFigureOut">
               <a:rPr lang="hu-HU" smtClean="0"/>
-              <a:t>2026. 02. 27.</a:t>
+              <a:t>2026. 03. 05.</a:t>
             </a:fld>
             <a:endParaRPr lang="hu-HU"/>
           </a:p>
@@ -2947,7 +2947,7 @@
           <a:p>
             <a:fld id="{274D99E6-559B-4424-821D-44BF482F5060}" type="datetimeFigureOut">
               <a:rPr lang="hu-HU" smtClean="0"/>
-              <a:t>2026. 02. 27.</a:t>
+              <a:t>2026. 03. 05.</a:t>
             </a:fld>
             <a:endParaRPr lang="hu-HU"/>
           </a:p>
@@ -3495,180 +3495,6 @@
   <p:clrMapOvr>
     <a:masterClrMapping/>
   </p:clrMapOvr>
-  <p:timing>
-    <p:tnLst>
-      <p:par>
-        <p:cTn id="1" dur="indefinite" restart="never" nodeType="tmRoot">
-          <p:childTnLst>
-            <p:seq concurrent="1" nextAc="seek">
-              <p:cTn id="2" dur="indefinite" nodeType="mainSeq">
-                <p:childTnLst>
-                  <p:par>
-                    <p:cTn id="3" fill="hold">
-                      <p:stCondLst>
-                        <p:cond delay="indefinite"/>
-                      </p:stCondLst>
-                      <p:childTnLst>
-                        <p:par>
-                          <p:cTn id="4" fill="hold">
-                            <p:stCondLst>
-                              <p:cond delay="0"/>
-                            </p:stCondLst>
-                            <p:childTnLst>
-                              <p:par>
-                                <p:cTn id="5" presetID="2" presetClass="entr" presetSubtype="1" fill="hold" nodeType="clickEffect">
-                                  <p:stCondLst>
-                                    <p:cond delay="0"/>
-                                  </p:stCondLst>
-                                  <p:childTnLst>
-                                    <p:set>
-                                      <p:cBhvr>
-                                        <p:cTn id="6" dur="1" fill="hold">
-                                          <p:stCondLst>
-                                            <p:cond delay="0"/>
-                                          </p:stCondLst>
-                                        </p:cTn>
-                                        <p:tgtEl>
-                                          <p:spTgt spid="5"/>
-                                        </p:tgtEl>
-                                        <p:attrNameLst>
-                                          <p:attrName>style.visibility</p:attrName>
-                                        </p:attrNameLst>
-                                      </p:cBhvr>
-                                      <p:to>
-                                        <p:strVal val="visible"/>
-                                      </p:to>
-                                    </p:set>
-                                    <p:anim calcmode="lin" valueType="num">
-                                      <p:cBhvr additive="base">
-                                        <p:cTn id="7" dur="750" fill="hold"/>
-                                        <p:tgtEl>
-                                          <p:spTgt spid="5"/>
-                                        </p:tgtEl>
-                                        <p:attrNameLst>
-                                          <p:attrName>ppt_x</p:attrName>
-                                        </p:attrNameLst>
-                                      </p:cBhvr>
-                                      <p:tavLst>
-                                        <p:tav tm="0">
-                                          <p:val>
-                                            <p:strVal val="#ppt_x"/>
-                                          </p:val>
-                                        </p:tav>
-                                        <p:tav tm="100000">
-                                          <p:val>
-                                            <p:strVal val="#ppt_x"/>
-                                          </p:val>
-                                        </p:tav>
-                                      </p:tavLst>
-                                    </p:anim>
-                                    <p:anim calcmode="lin" valueType="num">
-                                      <p:cBhvr additive="base">
-                                        <p:cTn id="8" dur="750" fill="hold"/>
-                                        <p:tgtEl>
-                                          <p:spTgt spid="5"/>
-                                        </p:tgtEl>
-                                        <p:attrNameLst>
-                                          <p:attrName>ppt_y</p:attrName>
-                                        </p:attrNameLst>
-                                      </p:cBhvr>
-                                      <p:tavLst>
-                                        <p:tav tm="0">
-                                          <p:val>
-                                            <p:strVal val="0-#ppt_h/2"/>
-                                          </p:val>
-                                        </p:tav>
-                                        <p:tav tm="100000">
-                                          <p:val>
-                                            <p:strVal val="#ppt_y"/>
-                                          </p:val>
-                                        </p:tav>
-                                      </p:tavLst>
-                                    </p:anim>
-                                  </p:childTnLst>
-                                </p:cTn>
-                              </p:par>
-                            </p:childTnLst>
-                          </p:cTn>
-                        </p:par>
-                      </p:childTnLst>
-                    </p:cTn>
-                  </p:par>
-                  <p:par>
-                    <p:cTn id="9" fill="hold">
-                      <p:stCondLst>
-                        <p:cond delay="indefinite"/>
-                      </p:stCondLst>
-                      <p:childTnLst>
-                        <p:par>
-                          <p:cTn id="10" fill="hold">
-                            <p:stCondLst>
-                              <p:cond delay="0"/>
-                            </p:stCondLst>
-                            <p:childTnLst>
-                              <p:par>
-                                <p:cTn id="11" presetID="10" presetClass="entr" presetSubtype="0" fill="hold" nodeType="clickEffect">
-                                  <p:stCondLst>
-                                    <p:cond delay="0"/>
-                                  </p:stCondLst>
-                                  <p:childTnLst>
-                                    <p:set>
-                                      <p:cBhvr>
-                                        <p:cTn id="12" dur="1" fill="hold">
-                                          <p:stCondLst>
-                                            <p:cond delay="0"/>
-                                          </p:stCondLst>
-                                        </p:cTn>
-                                        <p:tgtEl>
-                                          <p:spTgt spid="7"/>
-                                        </p:tgtEl>
-                                        <p:attrNameLst>
-                                          <p:attrName>style.visibility</p:attrName>
-                                        </p:attrNameLst>
-                                      </p:cBhvr>
-                                      <p:to>
-                                        <p:strVal val="visible"/>
-                                      </p:to>
-                                    </p:set>
-                                    <p:animEffect transition="in" filter="fade">
-                                      <p:cBhvr>
-                                        <p:cTn id="13" dur="750"/>
-                                        <p:tgtEl>
-                                          <p:spTgt spid="7"/>
-                                        </p:tgtEl>
-                                      </p:cBhvr>
-                                    </p:animEffect>
-                                  </p:childTnLst>
-                                </p:cTn>
-                              </p:par>
-                            </p:childTnLst>
-                          </p:cTn>
-                        </p:par>
-                      </p:childTnLst>
-                    </p:cTn>
-                  </p:par>
-                </p:childTnLst>
-              </p:cTn>
-              <p:prevCondLst>
-                <p:cond evt="onPrev" delay="0">
-                  <p:tgtEl>
-                    <p:sldTgt/>
-                  </p:tgtEl>
-                </p:cond>
-              </p:prevCondLst>
-              <p:nextCondLst>
-                <p:cond evt="onNext" delay="0">
-                  <p:tgtEl>
-                    <p:sldTgt/>
-                  </p:tgtEl>
-                </p:cond>
-              </p:nextCondLst>
-            </p:seq>
-          </p:childTnLst>
-        </p:cTn>
-      </p:par>
-    </p:tnLst>
-  </p:timing>
 </p:sld>
 </file>
 
@@ -4741,10 +4567,10 @@
       </p:sp>
       <p:pic>
         <p:nvPicPr>
-          <p:cNvPr id="7" name="Tartalom helye 6" descr="A képen szöveg, képernyőkép, szoftver, szám látható&#10;&#10;Előfordulhat, hogy az AI által létrehozott tartalom helytelen.">
-            <a:extLst>
-              <a:ext uri="{FF2B5EF4-FFF2-40B4-BE49-F238E27FC236}">
-                <a16:creationId xmlns:a16="http://schemas.microsoft.com/office/drawing/2014/main" id="{9D1B7347-1054-02A3-A3B6-D342C88DA800}"/>
+          <p:cNvPr id="8" name="Tartalom helye 7">
+            <a:extLst>
+              <a:ext uri="{FF2B5EF4-FFF2-40B4-BE49-F238E27FC236}">
+                <a16:creationId xmlns:a16="http://schemas.microsoft.com/office/drawing/2014/main" id="{FD81EC13-86DC-9B71-4E90-05B880719354}"/>
               </a:ext>
             </a:extLst>
           </p:cNvPr>
@@ -4769,8 +4595,8 @@
         </p:blipFill>
         <p:spPr>
           <a:xfrm>
-            <a:off x="6411484" y="1825625"/>
-            <a:ext cx="4703031" cy="4351338"/>
+            <a:off x="6418914" y="1825625"/>
+            <a:ext cx="4688171" cy="4351338"/>
           </a:xfrm>
           <a:prstGeom prst="rect">
             <a:avLst/>
